--- a/reports/flu_shot_analysis.pptx
+++ b/reports/flu_shot_analysis.pptx
@@ -4,6 +4,9 @@
   <p:sldMasterIdLst>
     <p:sldMasterId id="2147483648" r:id="rId1"/>
   </p:sldMasterIdLst>
+  <p:notesMasterIdLst>
+    <p:notesMasterId r:id="rId10"/>
+  </p:notesMasterIdLst>
   <p:sldIdLst>
     <p:sldId id="256" r:id="rId2"/>
     <p:sldId id="257" r:id="rId3"/>
@@ -14,10 +17,7 @@
     <p:sldId id="262" r:id="rId8"/>
     <p:sldId id="263" r:id="rId9"/>
   </p:sldIdLst>
-  <p:notesMasterIdLst>
-    <p:notesMasterId r:id="rId10"/>
-  </p:notesMasterIdLst>
-  <p:sldSz cx="9144000" cy="5143500"/>
+  <p:sldSz cx="9144000" cy="5143500" type="screen16x9"/>
   <p:notesSz cx="5143500" cy="9144000"/>
   <p:defaultTextStyle>
     <a:lvl1pPr marL="0" algn="l" defTabSz="914400" rtl="0" eaLnBrk="1" latinLnBrk="0" hangingPunct="1">
@@ -111,13 +111,20 @@
       </a:defRPr>
     </a:lvl9pPr>
   </p:defaultTextStyle>
+  <p:extLst>
+    <p:ext uri="{EFAFB233-063F-42B5-8137-9DF3F51BA10A}">
+      <p15:sldGuideLst xmlns:p15="http://schemas.microsoft.com/office/powerpoint/2012/main"/>
+    </p:ext>
+  </p:extLst>
 </p:presentation>
 </file>
 
 <file path=ppt/charts/chart1.xml><?xml version="1.0" encoding="utf-8"?>
-<c:chartSpace xmlns:c="http://schemas.openxmlformats.org/drawingml/2006/chart" xmlns:a="http://schemas.openxmlformats.org/drawingml/2006/main" xmlns:r="http://schemas.openxmlformats.org/officeDocument/2006/relationships">
+<c:chartSpace xmlns:c="http://schemas.openxmlformats.org/drawingml/2006/chart" xmlns:a="http://schemas.openxmlformats.org/drawingml/2006/main" xmlns:r="http://schemas.openxmlformats.org/officeDocument/2006/relationships" xmlns:c16r2="http://schemas.microsoft.com/office/drawing/2015/06/chart">
   <c:date1904 val="0"/>
+  <c:lang val="en-US"/>
   <c:roundedCorners val="1"/>
+  <c:style val="2"/>
   <c:chart>
     <c:autoTitleDeleted val="1"/>
     <c:plotArea>
@@ -149,18 +156,26 @@
           <c:invertIfNegative val="0"/>
           <c:dLbls>
             <c:numFmt formatCode="0.00" sourceLinked="0"/>
+            <c:spPr>
+              <a:noFill/>
+              <a:ln>
+                <a:noFill/>
+              </a:ln>
+              <a:effectLst/>
+            </c:spPr>
             <c:txPr>
               <a:bodyPr/>
               <a:lstStyle/>
               <a:p>
                 <a:pPr>
-                  <a:defRPr b="0" i="0" strike="noStrike" sz="900" u="none">
+                  <a:defRPr sz="900" b="0" i="0" u="none" strike="noStrike">
                     <a:solidFill>
                       <a:srgbClr val="1E293B"/>
                     </a:solidFill>
                     <a:latin typeface="Arial"/>
                   </a:defRPr>
                 </a:pPr>
+                <a:endParaRPr lang="en-US"/>
               </a:p>
             </c:txPr>
             <c:showLegendKey val="0"/>
@@ -170,34 +185,37 @@
             <c:showPercent val="0"/>
             <c:showBubbleSize val="0"/>
             <c:showLeaderLines val="0"/>
+            <c:extLst>
+              <c:ext xmlns:c15="http://schemas.microsoft.com/office/drawing/2012/chart" uri="{CE6537A1-D6FC-4f65-9D91-7224C49458BB}">
+                <c15:showLeaderLines val="0"/>
+              </c:ext>
+            </c:extLst>
           </c:dLbls>
           <c:cat>
-            <c:multiLvlStrRef>
+            <c:strRef>
               <c:f>Sheet1!$A$2:$A$7</c:f>
-              <c:multiLvlStrCache>
+              <c:strCache>
                 <c:ptCount val="6"/>
-                <c:lvl>
-                  <c:pt idx="0">
-                    <c:v>doctor_recc_h1n1</c:v>
-                  </c:pt>
-                  <c:pt idx="1">
-                    <c:v>opinion_seas_risk</c:v>
-                  </c:pt>
-                  <c:pt idx="2">
-                    <c:v>opinion_h1n1_risk</c:v>
-                  </c:pt>
-                  <c:pt idx="3">
-                    <c:v>doctor_recc_seasonal</c:v>
-                  </c:pt>
-                  <c:pt idx="4">
-                    <c:v>opinion_seas_vacc_effective</c:v>
-                  </c:pt>
-                  <c:pt idx="5">
-                    <c:v>opinion_h1n1_vacc_effective</c:v>
-                  </c:pt>
-                </c:lvl>
-              </c:multiLvlStrCache>
-            </c:multiLvlStrRef>
+                <c:pt idx="0">
+                  <c:v>doctor_recc_h1n1</c:v>
+                </c:pt>
+                <c:pt idx="1">
+                  <c:v>opinion_seas_risk</c:v>
+                </c:pt>
+                <c:pt idx="2">
+                  <c:v>opinion_h1n1_risk</c:v>
+                </c:pt>
+                <c:pt idx="3">
+                  <c:v>doctor_recc_seasonal</c:v>
+                </c:pt>
+                <c:pt idx="4">
+                  <c:v>opinion_seas_vacc_effective</c:v>
+                </c:pt>
+                <c:pt idx="5">
+                  <c:v>opinion_h1n1_vacc_effective</c:v>
+                </c:pt>
+              </c:strCache>
+            </c:strRef>
           </c:cat>
           <c:val>
             <c:numRef>
@@ -206,26 +224,31 @@
                 <c:formatCode>General</c:formatCode>
                 <c:ptCount val="6"/>
                 <c:pt idx="0">
-                  <c:v>0.394</c:v>
+                  <c:v>0.39400000000000002</c:v>
                 </c:pt>
                 <c:pt idx="1">
-                  <c:v>0.259</c:v>
+                  <c:v>0.25900000000000001</c:v>
                 </c:pt>
                 <c:pt idx="2">
-                  <c:v>0.323</c:v>
+                  <c:v>0.32300000000000001</c:v>
                 </c:pt>
                 <c:pt idx="3">
                   <c:v>0.21</c:v>
                 </c:pt>
                 <c:pt idx="4">
-                  <c:v>0.179</c:v>
+                  <c:v>0.17899999999999999</c:v>
                 </c:pt>
                 <c:pt idx="5">
-                  <c:v>0.269</c:v>
+                  <c:v>0.26900000000000002</c:v>
                 </c:pt>
               </c:numCache>
             </c:numRef>
           </c:val>
+          <c:extLst>
+            <c:ext xmlns:c16="http://schemas.microsoft.com/office/drawing/2014/chart" uri="{C3380CC4-5D6E-409C-BE32-E72D297353CC}">
+              <c16:uniqueId val="{00000000-5ED8-0B4A-BC96-18C6A865B0B9}"/>
+            </c:ext>
+          </c:extLst>
         </c:ser>
         <c:ser>
           <c:idx val="1"/>
@@ -250,18 +273,26 @@
           <c:invertIfNegative val="0"/>
           <c:dLbls>
             <c:numFmt formatCode="0.00" sourceLinked="0"/>
+            <c:spPr>
+              <a:noFill/>
+              <a:ln>
+                <a:noFill/>
+              </a:ln>
+              <a:effectLst/>
+            </c:spPr>
             <c:txPr>
               <a:bodyPr/>
               <a:lstStyle/>
               <a:p>
                 <a:pPr>
-                  <a:defRPr b="0" i="0" strike="noStrike" sz="900" u="none">
+                  <a:defRPr sz="900" b="0" i="0" u="none" strike="noStrike">
                     <a:solidFill>
                       <a:srgbClr val="1E293B"/>
                     </a:solidFill>
                     <a:latin typeface="Arial"/>
                   </a:defRPr>
                 </a:pPr>
+                <a:endParaRPr lang="en-US"/>
               </a:p>
             </c:txPr>
             <c:showLegendKey val="0"/>
@@ -271,34 +302,37 @@
             <c:showPercent val="0"/>
             <c:showBubbleSize val="0"/>
             <c:showLeaderLines val="0"/>
+            <c:extLst>
+              <c:ext xmlns:c15="http://schemas.microsoft.com/office/drawing/2012/chart" uri="{CE6537A1-D6FC-4f65-9D91-7224C49458BB}">
+                <c15:showLeaderLines val="0"/>
+              </c:ext>
+            </c:extLst>
           </c:dLbls>
           <c:cat>
-            <c:multiLvlStrRef>
+            <c:strRef>
               <c:f>Sheet1!$A$2:$A$7</c:f>
-              <c:multiLvlStrCache>
+              <c:strCache>
                 <c:ptCount val="6"/>
-                <c:lvl>
-                  <c:pt idx="0">
-                    <c:v>doctor_recc_h1n1</c:v>
-                  </c:pt>
-                  <c:pt idx="1">
-                    <c:v>opinion_seas_risk</c:v>
-                  </c:pt>
-                  <c:pt idx="2">
-                    <c:v>opinion_h1n1_risk</c:v>
-                  </c:pt>
-                  <c:pt idx="3">
-                    <c:v>doctor_recc_seasonal</c:v>
-                  </c:pt>
-                  <c:pt idx="4">
-                    <c:v>opinion_seas_vacc_effective</c:v>
-                  </c:pt>
-                  <c:pt idx="5">
-                    <c:v>opinion_h1n1_vacc_effective</c:v>
-                  </c:pt>
-                </c:lvl>
-              </c:multiLvlStrCache>
-            </c:multiLvlStrRef>
+                <c:pt idx="0">
+                  <c:v>doctor_recc_h1n1</c:v>
+                </c:pt>
+                <c:pt idx="1">
+                  <c:v>opinion_seas_risk</c:v>
+                </c:pt>
+                <c:pt idx="2">
+                  <c:v>opinion_h1n1_risk</c:v>
+                </c:pt>
+                <c:pt idx="3">
+                  <c:v>doctor_recc_seasonal</c:v>
+                </c:pt>
+                <c:pt idx="4">
+                  <c:v>opinion_seas_vacc_effective</c:v>
+                </c:pt>
+                <c:pt idx="5">
+                  <c:v>opinion_h1n1_vacc_effective</c:v>
+                </c:pt>
+              </c:strCache>
+            </c:strRef>
           </c:cat>
           <c:val>
             <c:numRef>
@@ -307,7 +341,7 @@
                 <c:formatCode>General</c:formatCode>
                 <c:ptCount val="6"/>
                 <c:pt idx="0">
-                  <c:v>0.199</c:v>
+                  <c:v>0.19900000000000001</c:v>
                 </c:pt>
                 <c:pt idx="1">
                   <c:v>0.39</c:v>
@@ -316,47 +350,34 @@
                   <c:v>0.217</c:v>
                 </c:pt>
                 <c:pt idx="3">
-                  <c:v>0.369</c:v>
+                  <c:v>0.36899999999999999</c:v>
                 </c:pt>
                 <c:pt idx="4">
-                  <c:v>0.362</c:v>
+                  <c:v>0.36199999999999999</c:v>
                 </c:pt>
                 <c:pt idx="5">
-                  <c:v>0.205</c:v>
+                  <c:v>0.20499999999999999</c:v>
                 </c:pt>
               </c:numCache>
             </c:numRef>
           </c:val>
+          <c:extLst>
+            <c:ext xmlns:c16="http://schemas.microsoft.com/office/drawing/2014/chart" uri="{C3380CC4-5D6E-409C-BE32-E72D297353CC}">
+              <c16:uniqueId val="{00000001-5ED8-0B4A-BC96-18C6A865B0B9}"/>
+            </c:ext>
+          </c:extLst>
         </c:ser>
         <c:dLbls>
-          <c:numFmt formatCode="0.00" sourceLinked="0"/>
-          <c:txPr>
-            <a:bodyPr/>
-            <a:lstStyle/>
-            <a:p>
-              <a:pPr>
-                <a:defRPr b="0" i="0" strike="noStrike" sz="900" u="none">
-                  <a:solidFill>
-                    <a:srgbClr val="1E293B"/>
-                  </a:solidFill>
-                  <a:latin typeface="Arial"/>
-                </a:defRPr>
-              </a:pPr>
-            </a:p>
-          </c:txPr>
           <c:showLegendKey val="0"/>
           <c:showVal val="1"/>
           <c:showCatName val="0"/>
           <c:showSerName val="0"/>
           <c:showPercent val="0"/>
           <c:showBubbleSize val="0"/>
-          <c:showLeaderLines val="0"/>
         </c:dLbls>
         <c:gapWidth val="150"/>
-        <c:overlap val="0"/>
         <c:axId val="2094734554"/>
         <c:axId val="2094734552"/>
-        <c:axId val="2094734556"/>
       </c:barChart>
       <c:catAx>
         <c:axId val="2094734554"/>
@@ -397,6 +418,7 @@
         <c:crosses val="autoZero"/>
         <c:auto val="1"/>
         <c:lblAlgn val="ctr"/>
+        <c:lblOffset val="100"/>
         <c:noMultiLvlLbl val="1"/>
       </c:catAx>
       <c:valAx>
@@ -465,7 +487,7 @@
         <a:lstStyle/>
         <a:p>
           <a:pPr>
-            <a:defRPr sz="1100">      </a:defRPr>
+            <a:defRPr sz="1100"/>
           </a:pPr>
           <a:endParaRPr lang="en-US"/>
         </a:p>
@@ -473,6 +495,7 @@
     </c:legend>
     <c:plotVisOnly val="1"/>
     <c:dispBlanksAs val="span"/>
+    <c:showDLblsOverMax val="1"/>
   </c:chart>
   <c:spPr>
     <a:solidFill>
@@ -511,234 +534,10 @@
           <a:chExt cx="0" cy="0"/>
         </a:xfrm>
       </p:grpSpPr>
-      <p:sp>
-        <p:nvSpPr>
-          <p:cNvPr id="2" name="Header Placeholder 1"/>
-          <p:cNvSpPr>
-            <a:spLocks noGrp="1"/>
-          </p:cNvSpPr>
-          <p:nvPr>
-            <p:ph type="hdr" sz="quarter"/>
-          </p:nvPr>
-        </p:nvSpPr>
-        <p:spPr>
-          <a:xfrm>
-            <a:off x="0" y="0"/>
-            <a:ext cx="2971800" cy="458788"/>
-          </a:xfrm>
-          <a:prstGeom prst="rect">
-            <a:avLst/>
-          </a:prstGeom>
-        </p:spPr>
-        <p:txBody>
-          <a:bodyPr vert="horz" lIns="91440" tIns="45720" rIns="91440" bIns="45720" rtlCol="0"/>
-          <a:lstStyle>
-            <a:lvl1pPr algn="l">
-              <a:defRPr sz="1200"/>
-            </a:lvl1pPr>
-          </a:lstStyle>
-          <a:p>
-            <a:endParaRPr lang="en-US"/>
-          </a:p>
-        </p:txBody>
-      </p:sp>
-      <p:sp>
-        <p:nvSpPr>
-          <p:cNvPr id="3" name="Date Placeholder 2"/>
-          <p:cNvSpPr>
-            <a:spLocks noGrp="1"/>
-          </p:cNvSpPr>
-          <p:nvPr>
-            <p:ph type="dt" idx="1"/>
-          </p:nvPr>
-        </p:nvSpPr>
-        <p:spPr>
-          <a:xfrm>
-            <a:off x="3884613" y="0"/>
-            <a:ext cx="2971800" cy="458788"/>
-          </a:xfrm>
-          <a:prstGeom prst="rect">
-            <a:avLst/>
-          </a:prstGeom>
-        </p:spPr>
-        <p:txBody>
-          <a:bodyPr vert="horz" lIns="91440" tIns="45720" rIns="91440" bIns="45720" rtlCol="0"/>
-          <a:lstStyle>
-            <a:lvl1pPr algn="r">
-              <a:defRPr sz="1200"/>
-            </a:lvl1pPr>
-          </a:lstStyle>
-          <a:p>
-            <a:fld id="{5282F153-3F37-0F45-9E97-73ACFA13230C}" type="datetimeFigureOut">
-              <a:rPr lang="en-US"/>
-              <a:t>7/23/19</a:t>
-            </a:fld>
-            <a:endParaRPr lang="en-US"/>
-          </a:p>
-        </p:txBody>
-      </p:sp>
-      <p:sp>
-        <p:nvSpPr>
-          <p:cNvPr id="4" name="Slide Image Placeholder 3"/>
-          <p:cNvSpPr>
-            <a:spLocks noGrp="1" noRot="1" noChangeAspect="1"/>
-          </p:cNvSpPr>
-          <p:nvPr>
-            <p:ph type="sldImg" idx="2"/>
-          </p:nvPr>
-        </p:nvSpPr>
-        <p:spPr>
-          <a:xfrm>
-            <a:off x="685800" y="1143000"/>
-            <a:ext cx="5486400" cy="3086100"/>
-          </a:xfrm>
-          <a:prstGeom prst="rect">
-            <a:avLst/>
-          </a:prstGeom>
-          <a:noFill/>
-          <a:ln w="12700">
-            <a:solidFill>
-              <a:prstClr val="black"/>
-            </a:solidFill>
-          </a:ln>
-        </p:spPr>
-        <p:txBody>
-          <a:bodyPr vert="horz" lIns="91440" tIns="45720" rIns="91440" bIns="45720" rtlCol="0" anchor="ctr"/>
-          <a:lstStyle/>
-          <a:p>
-            <a:endParaRPr lang="en-US"/>
-          </a:p>
-        </p:txBody>
-      </p:sp>
-      <p:sp>
-        <p:nvSpPr>
-          <p:cNvPr id="5" name="Notes Placeholder 4"/>
-          <p:cNvSpPr>
-            <a:spLocks noGrp="1"/>
-          </p:cNvSpPr>
-          <p:nvPr>
-            <p:ph type="body" sz="quarter" idx="3"/>
-          </p:nvPr>
-        </p:nvSpPr>
-        <p:spPr>
-          <a:xfrm>
-            <a:off x="685800" y="4400550"/>
-            <a:ext cx="5486400" cy="3600450"/>
-          </a:xfrm>
-          <a:prstGeom prst="rect">
-            <a:avLst/>
-          </a:prstGeom>
-        </p:spPr>
-        <p:txBody>
-          <a:bodyPr vert="horz" lIns="91440" tIns="45720" rIns="91440" bIns="45720" rtlCol="0"/>
-          <a:lstStyle/>
-          <a:p>
-            <a:pPr lvl="0"/>
-            <a:r>
-              <a:rPr lang="en-US"/>
-              <a:t>Click to edit Master text styles</a:t>
-            </a:r>
-          </a:p>
-          <a:p>
-            <a:pPr lvl="1"/>
-            <a:r>
-              <a:rPr lang="en-US"/>
-              <a:t>Second level</a:t>
-            </a:r>
-          </a:p>
-          <a:p>
-            <a:pPr lvl="2"/>
-            <a:r>
-              <a:rPr lang="en-US"/>
-              <a:t>Third level</a:t>
-            </a:r>
-          </a:p>
-          <a:p>
-            <a:pPr lvl="3"/>
-            <a:r>
-              <a:rPr lang="en-US"/>
-              <a:t>Fourth level</a:t>
-            </a:r>
-          </a:p>
-          <a:p>
-            <a:pPr lvl="4"/>
-            <a:r>
-              <a:rPr lang="en-US"/>
-              <a:t>Fifth level</a:t>
-            </a:r>
-          </a:p>
-        </p:txBody>
-      </p:sp>
-      <p:sp>
-        <p:nvSpPr>
-          <p:cNvPr id="6" name="Footer Placeholder 5"/>
-          <p:cNvSpPr>
-            <a:spLocks noGrp="1"/>
-          </p:cNvSpPr>
-          <p:nvPr>
-            <p:ph type="ftr" sz="quarter" idx="4"/>
-          </p:nvPr>
-        </p:nvSpPr>
-        <p:spPr>
-          <a:xfrm>
-            <a:off x="0" y="8685213"/>
-            <a:ext cx="2971800" cy="458787"/>
-          </a:xfrm>
-          <a:prstGeom prst="rect">
-            <a:avLst/>
-          </a:prstGeom>
-        </p:spPr>
-        <p:txBody>
-          <a:bodyPr vert="horz" lIns="91440" tIns="45720" rIns="91440" bIns="45720" rtlCol="0" anchor="b"/>
-          <a:lstStyle>
-            <a:lvl1pPr algn="l">
-              <a:defRPr sz="1200"/>
-            </a:lvl1pPr>
-          </a:lstStyle>
-          <a:p>
-            <a:endParaRPr lang="en-US"/>
-          </a:p>
-        </p:txBody>
-      </p:sp>
-      <p:sp>
-        <p:nvSpPr>
-          <p:cNvPr id="7" name="Slide Number Placeholder 6"/>
-          <p:cNvSpPr>
-            <a:spLocks noGrp="1"/>
-          </p:cNvSpPr>
-          <p:nvPr>
-            <p:ph type="sldNum" sz="quarter" idx="5"/>
-          </p:nvPr>
-        </p:nvSpPr>
-        <p:spPr>
-          <a:xfrm>
-            <a:off x="3884613" y="8685213"/>
-            <a:ext cx="2971800" cy="458787"/>
-          </a:xfrm>
-          <a:prstGeom prst="rect">
-            <a:avLst/>
-          </a:prstGeom>
-        </p:spPr>
-        <p:txBody>
-          <a:bodyPr vert="horz" lIns="91440" tIns="45720" rIns="91440" bIns="45720" rtlCol="0" anchor="b"/>
-          <a:lstStyle>
-            <a:lvl1pPr algn="r">
-              <a:defRPr sz="1200"/>
-            </a:lvl1pPr>
-          </a:lstStyle>
-          <a:p>
-            <a:fld id="{CE5E9CC1-C706-0F49-92D6-E571CC5EEA8F}" type="slidenum">
-              <a:rPr lang="en-US"/>
-              <a:t>‹#›</a:t>
-            </a:fld>
-            <a:endParaRPr lang="en-US"/>
-          </a:p>
-        </p:txBody>
-      </p:sp>
     </p:spTree>
     <p:extLst>
       <p:ext uri="{BB962C8B-B14F-4D97-AF65-F5344CB8AC3E}">
-        <p14:creationId xmlns:p14="http://schemas.microsoft.com/office/powerpoint/2010/main" val="1024086991"/>
+        <p14:creationId xmlns:p14="http://schemas.microsoft.com/office/powerpoint/2010/main" val="3507782560"/>
       </p:ext>
     </p:extLst>
   </p:cSld>
@@ -882,10 +681,6 @@
           <a:bodyPr/>
           <a:lstStyle/>
           <a:p>
-            <a:r>
-              <a:rPr lang="en-US" dirty="0"/>
-              <a:t/>
-            </a:r>
             <a:endParaRPr lang="en-US" dirty="0"/>
           </a:p>
         </p:txBody>
@@ -970,10 +765,6 @@
           <a:bodyPr/>
           <a:lstStyle/>
           <a:p>
-            <a:r>
-              <a:rPr lang="en-US" dirty="0"/>
-              <a:t/>
-            </a:r>
             <a:endParaRPr lang="en-US" dirty="0"/>
           </a:p>
         </p:txBody>
@@ -1058,10 +849,6 @@
           <a:bodyPr/>
           <a:lstStyle/>
           <a:p>
-            <a:r>
-              <a:rPr lang="en-US" dirty="0"/>
-              <a:t/>
-            </a:r>
             <a:endParaRPr lang="en-US" dirty="0"/>
           </a:p>
         </p:txBody>
@@ -1146,10 +933,6 @@
           <a:bodyPr/>
           <a:lstStyle/>
           <a:p>
-            <a:r>
-              <a:rPr lang="en-US" dirty="0"/>
-              <a:t/>
-            </a:r>
             <a:endParaRPr lang="en-US" dirty="0"/>
           </a:p>
         </p:txBody>
@@ -1234,10 +1017,6 @@
           <a:bodyPr/>
           <a:lstStyle/>
           <a:p>
-            <a:r>
-              <a:rPr lang="en-US" dirty="0"/>
-              <a:t/>
-            </a:r>
             <a:endParaRPr lang="en-US" dirty="0"/>
           </a:p>
         </p:txBody>
@@ -1322,10 +1101,6 @@
           <a:bodyPr/>
           <a:lstStyle/>
           <a:p>
-            <a:r>
-              <a:rPr lang="en-US" dirty="0"/>
-              <a:t/>
-            </a:r>
             <a:endParaRPr lang="en-US" dirty="0"/>
           </a:p>
         </p:txBody>
@@ -1410,10 +1185,6 @@
           <a:bodyPr/>
           <a:lstStyle/>
           <a:p>
-            <a:r>
-              <a:rPr lang="en-US" dirty="0"/>
-              <a:t/>
-            </a:r>
             <a:endParaRPr lang="en-US" dirty="0"/>
           </a:p>
         </p:txBody>
@@ -1498,10 +1269,6 @@
           <a:bodyPr/>
           <a:lstStyle/>
           <a:p>
-            <a:r>
-              <a:rPr lang="en-US" dirty="0"/>
-              <a:t/>
-            </a:r>
             <a:endParaRPr lang="en-US" dirty="0"/>
           </a:p>
         </p:txBody>
@@ -1575,6 +1342,11 @@
 <file path=ppt/slideMasters/slideMaster1.xml><?xml version="1.0" encoding="utf-8"?>
 <p:sldMaster xmlns:a="http://schemas.openxmlformats.org/drawingml/2006/main" xmlns:r="http://schemas.openxmlformats.org/officeDocument/2006/relationships" xmlns:p="http://schemas.openxmlformats.org/presentationml/2006/main">
   <p:cSld>
+    <p:bg>
+      <p:bgRef idx="1001">
+        <a:schemeClr val="bg1"/>
+      </p:bgRef>
+    </p:bg>
     <p:spTree>
       <p:nvGrpSpPr>
         <p:cNvPr id="1" name=""/>
@@ -1857,6 +1629,7 @@
         <a:solidFill>
           <a:srgbClr val="1B2A4A"/>
         </a:solidFill>
+        <a:effectLst/>
       </p:bgPr>
     </p:bg>
     <p:spTree>
@@ -1944,7 +1717,7 @@
           <a:bodyPr wrap="square" lIns="0" tIns="0" rIns="0" bIns="0" rtlCol="0" anchor="ctr"/>
           <a:lstStyle/>
           <a:p>
-            <a:pPr algn="ctr" indent="0" marL="0">
+            <a:pPr marL="0" indent="0" algn="ctr">
               <a:buNone/>
             </a:pPr>
             <a:r>
@@ -1961,7 +1734,7 @@
             <a:endParaRPr lang="en-US" sz="3600" dirty="0"/>
           </a:p>
           <a:p>
-            <a:pPr algn="ctr" indent="0" marL="0">
+            <a:pPr marL="0" indent="0" algn="ctr">
               <a:buNone/>
             </a:pPr>
             <a:r>
@@ -1981,45 +1754,6 @@
       </p:sp>
       <p:sp>
         <p:nvSpPr>
-          <p:cNvPr id="5" name="Text 3"/>
-          <p:cNvSpPr/>
-          <p:nvPr/>
-        </p:nvSpPr>
-        <p:spPr>
-          <a:xfrm>
-            <a:off x="365760" y="2788920"/>
-            <a:ext cx="8412480" cy="502920"/>
-          </a:xfrm>
-          <a:prstGeom prst="rect">
-            <a:avLst/>
-          </a:prstGeom>
-          <a:noFill/>
-          <a:ln/>
-        </p:spPr>
-        <p:txBody>
-          <a:bodyPr wrap="square" lIns="0" tIns="0" rIns="0" bIns="0" rtlCol="0" anchor="ctr"/>
-          <a:lstStyle/>
-          <a:p>
-            <a:pPr algn="ctr" indent="0" marL="0">
-              <a:buNone/>
-            </a:pPr>
-            <a:r>
-              <a:rPr lang="en-US" sz="1300" dirty="0">
-                <a:solidFill>
-                  <a:srgbClr val="32E0C4"/>
-                </a:solidFill>
-                <a:latin typeface="Calibri" pitchFamily="34" charset="0"/>
-                <a:ea typeface="Calibri" pitchFamily="34" charset="-122"/>
-                <a:cs typeface="Calibri" pitchFamily="34" charset="-120"/>
-              </a:rPr>
-              <a:t>EDA  ·  Feature Engineering  ·  Model Selection  ·  Evaluation</a:t>
-            </a:r>
-            <a:endParaRPr lang="en-US" sz="1300" dirty="0"/>
-          </a:p>
-        </p:txBody>
-      </p:sp>
-      <p:sp>
-        <p:nvSpPr>
           <p:cNvPr id="6" name="Text 4"/>
           <p:cNvSpPr/>
           <p:nvPr/>
@@ -2039,7 +1773,7 @@
           <a:bodyPr wrap="square" lIns="0" tIns="0" rIns="0" bIns="0" rtlCol="0" anchor="ctr"/>
           <a:lstStyle/>
           <a:p>
-            <a:pPr algn="ctr" indent="0" marL="0">
+            <a:pPr marL="0" indent="0" algn="ctr">
               <a:buNone/>
             </a:pPr>
             <a:r>
@@ -2051,7 +1785,23 @@
                 <a:ea typeface="Calibri" pitchFamily="34" charset="-122"/>
                 <a:cs typeface="Calibri" pitchFamily="34" charset="-120"/>
               </a:rPr>
-              <a:t>Jarret Angbazo  |  May 2026</a:t>
+              <a:t>Jarret Angbazo</a:t>
+            </a:r>
+          </a:p>
+          <a:p>
+            <a:pPr marL="0" indent="0" algn="ctr">
+              <a:buNone/>
+            </a:pPr>
+            <a:r>
+              <a:rPr lang="en-US" sz="1300" dirty="0">
+                <a:solidFill>
+                  <a:srgbClr val="FFFFFF"/>
+                </a:solidFill>
+                <a:latin typeface="Calibri" pitchFamily="34" charset="0"/>
+                <a:ea typeface="Calibri" pitchFamily="34" charset="-122"/>
+                <a:cs typeface="Calibri" pitchFamily="34" charset="-120"/>
+              </a:rPr>
+              <a:t>May 2026</a:t>
             </a:r>
             <a:endParaRPr lang="en-US" sz="1300" dirty="0"/>
           </a:p>
@@ -2073,6 +1823,7 @@
         <a:solidFill>
           <a:srgbClr val="F4F7F9"/>
         </a:solidFill>
+        <a:effectLst/>
       </p:bgPr>
     </p:bg>
     <p:spTree>
@@ -2160,7 +1911,7 @@
           <a:bodyPr wrap="square" lIns="0" tIns="0" rIns="0" bIns="0" rtlCol="0" anchor="ctr"/>
           <a:lstStyle/>
           <a:p>
-            <a:pPr indent="0" marL="0">
+            <a:pPr marL="0" indent="0">
               <a:buNone/>
             </a:pPr>
             <a:r>
@@ -2202,7 +1953,7 @@
             <a:prstDash val="solid"/>
           </a:ln>
           <a:effectLst>
-            <a:outerShdw sx="100000" sy="100000" kx="0" ky="0" algn="bl" rotWithShape="0" blurRad="101600" dist="38100" dir="8100000">
+            <a:outerShdw blurRad="101600" dist="38100" dir="8100000" algn="bl" rotWithShape="0">
               <a:srgbClr val="000000">
                 <a:alpha val="12000"/>
               </a:srgbClr>
@@ -2231,7 +1982,7 @@
           <a:bodyPr wrap="square" lIns="0" tIns="0" rIns="0" bIns="0" rtlCol="0" anchor="b"/>
           <a:lstStyle/>
           <a:p>
-            <a:pPr algn="ctr" indent="0" marL="0">
+            <a:pPr marL="0" indent="0" algn="ctr">
               <a:buNone/>
             </a:pPr>
             <a:r>
@@ -2270,7 +2021,7 @@
           <a:bodyPr wrap="square" lIns="0" tIns="0" rIns="0" bIns="0" rtlCol="0" anchor="ctr"/>
           <a:lstStyle/>
           <a:p>
-            <a:pPr algn="ctr" indent="0" marL="0">
+            <a:pPr marL="0" indent="0" algn="ctr">
               <a:buNone/>
             </a:pPr>
             <a:r>
@@ -2309,7 +2060,7 @@
           <a:bodyPr wrap="square" lIns="0" tIns="0" rIns="0" bIns="0" rtlCol="0" anchor="ctr"/>
           <a:lstStyle/>
           <a:p>
-            <a:pPr algn="ctr" indent="0" marL="0">
+            <a:pPr marL="0" indent="0" algn="ctr">
               <a:buNone/>
             </a:pPr>
             <a:r>
@@ -2351,7 +2102,7 @@
             <a:prstDash val="solid"/>
           </a:ln>
           <a:effectLst>
-            <a:outerShdw sx="100000" sy="100000" kx="0" ky="0" algn="bl" rotWithShape="0" blurRad="101600" dist="38100" dir="8100000">
+            <a:outerShdw blurRad="101600" dist="38100" dir="8100000" algn="bl" rotWithShape="0">
               <a:srgbClr val="000000">
                 <a:alpha val="12000"/>
               </a:srgbClr>
@@ -2380,7 +2131,7 @@
           <a:bodyPr wrap="square" lIns="0" tIns="0" rIns="0" bIns="0" rtlCol="0" anchor="b"/>
           <a:lstStyle/>
           <a:p>
-            <a:pPr algn="ctr" indent="0" marL="0">
+            <a:pPr marL="0" indent="0" algn="ctr">
               <a:buNone/>
             </a:pPr>
             <a:r>
@@ -2419,7 +2170,7 @@
           <a:bodyPr wrap="square" lIns="0" tIns="0" rIns="0" bIns="0" rtlCol="0" anchor="ctr"/>
           <a:lstStyle/>
           <a:p>
-            <a:pPr algn="ctr" indent="0" marL="0">
+            <a:pPr marL="0" indent="0" algn="ctr">
               <a:buNone/>
             </a:pPr>
             <a:r>
@@ -2458,7 +2209,7 @@
           <a:bodyPr wrap="square" lIns="0" tIns="0" rIns="0" bIns="0" rtlCol="0" anchor="ctr"/>
           <a:lstStyle/>
           <a:p>
-            <a:pPr algn="ctr" indent="0" marL="0">
+            <a:pPr marL="0" indent="0" algn="ctr">
               <a:buNone/>
             </a:pPr>
             <a:r>
@@ -2500,7 +2251,7 @@
             <a:prstDash val="solid"/>
           </a:ln>
           <a:effectLst>
-            <a:outerShdw sx="100000" sy="100000" kx="0" ky="0" algn="bl" rotWithShape="0" blurRad="101600" dist="38100" dir="8100000">
+            <a:outerShdw blurRad="101600" dist="38100" dir="8100000" algn="bl" rotWithShape="0">
               <a:srgbClr val="000000">
                 <a:alpha val="12000"/>
               </a:srgbClr>
@@ -2529,7 +2280,7 @@
           <a:bodyPr wrap="square" lIns="0" tIns="0" rIns="0" bIns="0" rtlCol="0" anchor="b"/>
           <a:lstStyle/>
           <a:p>
-            <a:pPr algn="ctr" indent="0" marL="0">
+            <a:pPr marL="0" indent="0" algn="ctr">
               <a:buNone/>
             </a:pPr>
             <a:r>
@@ -2568,7 +2319,7 @@
           <a:bodyPr wrap="square" lIns="0" tIns="0" rIns="0" bIns="0" rtlCol="0" anchor="ctr"/>
           <a:lstStyle/>
           <a:p>
-            <a:pPr algn="ctr" indent="0" marL="0">
+            <a:pPr marL="0" indent="0" algn="ctr">
               <a:buNone/>
             </a:pPr>
             <a:r>
@@ -2607,7 +2358,7 @@
           <a:bodyPr wrap="square" lIns="0" tIns="0" rIns="0" bIns="0" rtlCol="0" anchor="ctr"/>
           <a:lstStyle/>
           <a:p>
-            <a:pPr algn="ctr" indent="0" marL="0">
+            <a:pPr marL="0" indent="0" algn="ctr">
               <a:buNone/>
             </a:pPr>
             <a:r>
@@ -2646,7 +2397,7 @@
           <a:bodyPr wrap="square" lIns="0" tIns="0" rIns="0" bIns="0" rtlCol="0" anchor="ctr"/>
           <a:lstStyle/>
           <a:p>
-            <a:pPr algn="ctr" indent="0" marL="0">
+            <a:pPr marL="0" indent="0" algn="ctr">
               <a:buNone/>
             </a:pPr>
             <a:r>
@@ -2666,7 +2417,7 @@
       </p:sp>
       <p:graphicFrame>
         <p:nvGraphicFramePr>
-          <p:cNvPr id="3" name="Table 0"/>
+          <p:cNvPr id="18" name="Table 0"/>
           <p:cNvGraphicFramePr>
             <a:graphicFrameLocks noGrp="1"/>
           </p:cNvGraphicFramePr>
@@ -2687,10 +2438,34 @@
             <a:tbl>
               <a:tblPr/>
               <a:tblGrid>
-                <a:gridCol w="2926080"/>
-                <a:gridCol w="1828800"/>
-                <a:gridCol w="2011680"/>
-                <a:gridCol w="1737360"/>
+                <a:gridCol w="2926080">
+                  <a:extLst>
+                    <a:ext uri="{9D8B030D-6E8A-4147-A177-3AD203B41FA5}">
+                      <a16:colId xmlns:a16="http://schemas.microsoft.com/office/drawing/2014/main" val="20000"/>
+                    </a:ext>
+                  </a:extLst>
+                </a:gridCol>
+                <a:gridCol w="1828800">
+                  <a:extLst>
+                    <a:ext uri="{9D8B030D-6E8A-4147-A177-3AD203B41FA5}">
+                      <a16:colId xmlns:a16="http://schemas.microsoft.com/office/drawing/2014/main" val="20001"/>
+                    </a:ext>
+                  </a:extLst>
+                </a:gridCol>
+                <a:gridCol w="2011680">
+                  <a:extLst>
+                    <a:ext uri="{9D8B030D-6E8A-4147-A177-3AD203B41FA5}">
+                      <a16:colId xmlns:a16="http://schemas.microsoft.com/office/drawing/2014/main" val="20002"/>
+                    </a:ext>
+                  </a:extLst>
+                </a:gridCol>
+                <a:gridCol w="1737360">
+                  <a:extLst>
+                    <a:ext uri="{9D8B030D-6E8A-4147-A177-3AD203B41FA5}">
+                      <a16:colId xmlns:a16="http://schemas.microsoft.com/office/drawing/2014/main" val="20003"/>
+                    </a:ext>
+                  </a:extLst>
+                </a:gridCol>
               </a:tblGrid>
               <a:tr h="301752">
                 <a:tc>
@@ -2698,7 +2473,7 @@
                     <a:bodyPr/>
                     <a:lstStyle/>
                     <a:p>
-                      <a:pPr indent="0" marL="0">
+                      <a:pPr marL="0" indent="0">
                         <a:buNone/>
                       </a:pPr>
                       <a:r>
@@ -2719,7 +2494,7 @@
                       </a:endParaRPr>
                     </a:p>
                   </a:txBody>
-                  <a:tcPr marL="91440" marR="91440" marT="45720" marB="45720">
+                  <a:tcPr>
                     <a:lnL w="6350" cap="flat" cmpd="sng" algn="ctr">
                       <a:solidFill>
                         <a:srgbClr val="E8EDF2"/>
@@ -2766,7 +2541,7 @@
                     <a:bodyPr/>
                     <a:lstStyle/>
                     <a:p>
-                      <a:pPr indent="0" marL="0">
+                      <a:pPr marL="0" indent="0">
                         <a:buNone/>
                       </a:pPr>
                       <a:r>
@@ -2787,7 +2562,7 @@
                       </a:endParaRPr>
                     </a:p>
                   </a:txBody>
-                  <a:tcPr marL="91440" marR="91440" marT="45720" marB="45720">
+                  <a:tcPr>
                     <a:lnL w="6350" cap="flat" cmpd="sng" algn="ctr">
                       <a:solidFill>
                         <a:srgbClr val="E8EDF2"/>
@@ -2834,7 +2609,7 @@
                     <a:bodyPr/>
                     <a:lstStyle/>
                     <a:p>
-                      <a:pPr indent="0" marL="0">
+                      <a:pPr marL="0" indent="0">
                         <a:buNone/>
                       </a:pPr>
                       <a:r>
@@ -2855,7 +2630,7 @@
                       </a:endParaRPr>
                     </a:p>
                   </a:txBody>
-                  <a:tcPr marL="91440" marR="91440" marT="45720" marB="45720">
+                  <a:tcPr>
                     <a:lnL w="6350" cap="flat" cmpd="sng" algn="ctr">
                       <a:solidFill>
                         <a:srgbClr val="E8EDF2"/>
@@ -2902,7 +2677,7 @@
                     <a:bodyPr/>
                     <a:lstStyle/>
                     <a:p>
-                      <a:pPr indent="0" marL="0">
+                      <a:pPr marL="0" indent="0">
                         <a:buNone/>
                       </a:pPr>
                       <a:r>
@@ -2923,7 +2698,7 @@
                       </a:endParaRPr>
                     </a:p>
                   </a:txBody>
-                  <a:tcPr marL="91440" marR="91440" marT="45720" marB="45720">
+                  <a:tcPr>
                     <a:lnL w="6350" cap="flat" cmpd="sng" algn="ctr">
                       <a:solidFill>
                         <a:srgbClr val="E8EDF2"/>
@@ -2965,6 +2740,11 @@
                     </a:solidFill>
                   </a:tcPr>
                 </a:tc>
+                <a:extLst>
+                  <a:ext uri="{0D108BD9-81ED-4DB2-BD59-A6C34878D82A}">
+                    <a16:rowId xmlns:a16="http://schemas.microsoft.com/office/drawing/2014/main" val="10000"/>
+                  </a:ext>
+                </a:extLst>
               </a:tr>
               <a:tr h="301752">
                 <a:tc>
@@ -2972,7 +2752,7 @@
                     <a:bodyPr/>
                     <a:lstStyle/>
                     <a:p>
-                      <a:pPr indent="0" marL="0">
+                      <a:pPr marL="0" indent="0">
                         <a:buNone/>
                       </a:pPr>
                       <a:r>
@@ -2993,7 +2773,7 @@
                       </a:endParaRPr>
                     </a:p>
                   </a:txBody>
-                  <a:tcPr marL="91440" marR="91440" marT="45720" marB="45720">
+                  <a:tcPr>
                     <a:lnL w="6350" cap="flat" cmpd="sng" algn="ctr">
                       <a:solidFill>
                         <a:srgbClr val="E8EDF2"/>
@@ -3037,7 +2817,7 @@
                     <a:bodyPr/>
                     <a:lstStyle/>
                     <a:p>
-                      <a:pPr indent="0" marL="0">
+                      <a:pPr marL="0" indent="0">
                         <a:buNone/>
                       </a:pPr>
                       <a:r>
@@ -3058,7 +2838,7 @@
                       </a:endParaRPr>
                     </a:p>
                   </a:txBody>
-                  <a:tcPr marL="91440" marR="91440" marT="45720" marB="45720">
+                  <a:tcPr>
                     <a:lnL w="6350" cap="flat" cmpd="sng" algn="ctr">
                       <a:solidFill>
                         <a:srgbClr val="E8EDF2"/>
@@ -3102,7 +2882,7 @@
                     <a:bodyPr/>
                     <a:lstStyle/>
                     <a:p>
-                      <a:pPr indent="0" marL="0">
+                      <a:pPr marL="0" indent="0">
                         <a:buNone/>
                       </a:pPr>
                       <a:r>
@@ -3123,7 +2903,7 @@
                       </a:endParaRPr>
                     </a:p>
                   </a:txBody>
-                  <a:tcPr marL="91440" marR="91440" marT="45720" marB="45720">
+                  <a:tcPr>
                     <a:lnL w="6350" cap="flat" cmpd="sng" algn="ctr">
                       <a:solidFill>
                         <a:srgbClr val="E8EDF2"/>
@@ -3167,7 +2947,7 @@
                     <a:bodyPr/>
                     <a:lstStyle/>
                     <a:p>
-                      <a:pPr indent="0" marL="0">
+                      <a:pPr marL="0" indent="0">
                         <a:buNone/>
                       </a:pPr>
                       <a:r>
@@ -3188,7 +2968,7 @@
                       </a:endParaRPr>
                     </a:p>
                   </a:txBody>
-                  <a:tcPr marL="91440" marR="91440" marT="45720" marB="45720">
+                  <a:tcPr>
                     <a:lnL w="6350" cap="flat" cmpd="sng" algn="ctr">
                       <a:solidFill>
                         <a:srgbClr val="E8EDF2"/>
@@ -3227,6 +3007,11 @@
                     </a:lnB>
                   </a:tcPr>
                 </a:tc>
+                <a:extLst>
+                  <a:ext uri="{0D108BD9-81ED-4DB2-BD59-A6C34878D82A}">
+                    <a16:rowId xmlns:a16="http://schemas.microsoft.com/office/drawing/2014/main" val="10001"/>
+                  </a:ext>
+                </a:extLst>
               </a:tr>
               <a:tr h="301752">
                 <a:tc>
@@ -3234,7 +3019,7 @@
                     <a:bodyPr/>
                     <a:lstStyle/>
                     <a:p>
-                      <a:pPr indent="0" marL="0">
+                      <a:pPr marL="0" indent="0">
                         <a:buNone/>
                       </a:pPr>
                       <a:r>
@@ -3255,7 +3040,7 @@
                       </a:endParaRPr>
                     </a:p>
                   </a:txBody>
-                  <a:tcPr marL="91440" marR="91440" marT="45720" marB="45720">
+                  <a:tcPr>
                     <a:lnL w="6350" cap="flat" cmpd="sng" algn="ctr">
                       <a:solidFill>
                         <a:srgbClr val="E8EDF2"/>
@@ -3299,7 +3084,7 @@
                     <a:bodyPr/>
                     <a:lstStyle/>
                     <a:p>
-                      <a:pPr indent="0" marL="0">
+                      <a:pPr marL="0" indent="0">
                         <a:buNone/>
                       </a:pPr>
                       <a:r>
@@ -3320,7 +3105,7 @@
                       </a:endParaRPr>
                     </a:p>
                   </a:txBody>
-                  <a:tcPr marL="91440" marR="91440" marT="45720" marB="45720">
+                  <a:tcPr>
                     <a:lnL w="6350" cap="flat" cmpd="sng" algn="ctr">
                       <a:solidFill>
                         <a:srgbClr val="E8EDF2"/>
@@ -3364,7 +3149,7 @@
                     <a:bodyPr/>
                     <a:lstStyle/>
                     <a:p>
-                      <a:pPr indent="0" marL="0">
+                      <a:pPr marL="0" indent="0">
                         <a:buNone/>
                       </a:pPr>
                       <a:r>
@@ -3385,7 +3170,7 @@
                       </a:endParaRPr>
                     </a:p>
                   </a:txBody>
-                  <a:tcPr marL="91440" marR="91440" marT="45720" marB="45720">
+                  <a:tcPr>
                     <a:lnL w="6350" cap="flat" cmpd="sng" algn="ctr">
                       <a:solidFill>
                         <a:srgbClr val="E8EDF2"/>
@@ -3429,7 +3214,7 @@
                     <a:bodyPr/>
                     <a:lstStyle/>
                     <a:p>
-                      <a:pPr indent="0" marL="0">
+                      <a:pPr marL="0" indent="0">
                         <a:buNone/>
                       </a:pPr>
                       <a:r>
@@ -3450,7 +3235,7 @@
                       </a:endParaRPr>
                     </a:p>
                   </a:txBody>
-                  <a:tcPr marL="91440" marR="91440" marT="45720" marB="45720">
+                  <a:tcPr>
                     <a:lnL w="6350" cap="flat" cmpd="sng" algn="ctr">
                       <a:solidFill>
                         <a:srgbClr val="E8EDF2"/>
@@ -3489,6 +3274,11 @@
                     </a:lnB>
                   </a:tcPr>
                 </a:tc>
+                <a:extLst>
+                  <a:ext uri="{0D108BD9-81ED-4DB2-BD59-A6C34878D82A}">
+                    <a16:rowId xmlns:a16="http://schemas.microsoft.com/office/drawing/2014/main" val="10002"/>
+                  </a:ext>
+                </a:extLst>
               </a:tr>
               <a:tr h="301752">
                 <a:tc>
@@ -3496,7 +3286,7 @@
                     <a:bodyPr/>
                     <a:lstStyle/>
                     <a:p>
-                      <a:pPr indent="0" marL="0">
+                      <a:pPr marL="0" indent="0">
                         <a:buNone/>
                       </a:pPr>
                       <a:r>
@@ -3517,7 +3307,7 @@
                       </a:endParaRPr>
                     </a:p>
                   </a:txBody>
-                  <a:tcPr marL="91440" marR="91440" marT="45720" marB="45720">
+                  <a:tcPr>
                     <a:lnL w="6350" cap="flat" cmpd="sng" algn="ctr">
                       <a:solidFill>
                         <a:srgbClr val="E8EDF2"/>
@@ -3561,7 +3351,7 @@
                     <a:bodyPr/>
                     <a:lstStyle/>
                     <a:p>
-                      <a:pPr indent="0" marL="0">
+                      <a:pPr marL="0" indent="0">
                         <a:buNone/>
                       </a:pPr>
                       <a:r>
@@ -3582,7 +3372,7 @@
                       </a:endParaRPr>
                     </a:p>
                   </a:txBody>
-                  <a:tcPr marL="91440" marR="91440" marT="45720" marB="45720">
+                  <a:tcPr>
                     <a:lnL w="6350" cap="flat" cmpd="sng" algn="ctr">
                       <a:solidFill>
                         <a:srgbClr val="E8EDF2"/>
@@ -3626,7 +3416,7 @@
                     <a:bodyPr/>
                     <a:lstStyle/>
                     <a:p>
-                      <a:pPr indent="0" marL="0">
+                      <a:pPr marL="0" indent="0">
                         <a:buNone/>
                       </a:pPr>
                       <a:r>
@@ -3647,7 +3437,7 @@
                       </a:endParaRPr>
                     </a:p>
                   </a:txBody>
-                  <a:tcPr marL="91440" marR="91440" marT="45720" marB="45720">
+                  <a:tcPr>
                     <a:lnL w="6350" cap="flat" cmpd="sng" algn="ctr">
                       <a:solidFill>
                         <a:srgbClr val="E8EDF2"/>
@@ -3691,7 +3481,7 @@
                     <a:bodyPr/>
                     <a:lstStyle/>
                     <a:p>
-                      <a:pPr indent="0" marL="0">
+                      <a:pPr marL="0" indent="0">
                         <a:buNone/>
                       </a:pPr>
                       <a:r>
@@ -3712,7 +3502,7 @@
                       </a:endParaRPr>
                     </a:p>
                   </a:txBody>
-                  <a:tcPr marL="91440" marR="91440" marT="45720" marB="45720">
+                  <a:tcPr>
                     <a:lnL w="6350" cap="flat" cmpd="sng" algn="ctr">
                       <a:solidFill>
                         <a:srgbClr val="E8EDF2"/>
@@ -3751,6 +3541,11 @@
                     </a:lnB>
                   </a:tcPr>
                 </a:tc>
+                <a:extLst>
+                  <a:ext uri="{0D108BD9-81ED-4DB2-BD59-A6C34878D82A}">
+                    <a16:rowId xmlns:a16="http://schemas.microsoft.com/office/drawing/2014/main" val="10003"/>
+                  </a:ext>
+                </a:extLst>
               </a:tr>
               <a:tr h="301752">
                 <a:tc>
@@ -3758,7 +3553,7 @@
                     <a:bodyPr/>
                     <a:lstStyle/>
                     <a:p>
-                      <a:pPr indent="0" marL="0">
+                      <a:pPr marL="0" indent="0">
                         <a:buNone/>
                       </a:pPr>
                       <a:r>
@@ -3779,7 +3574,7 @@
                       </a:endParaRPr>
                     </a:p>
                   </a:txBody>
-                  <a:tcPr marL="91440" marR="91440" marT="45720" marB="45720">
+                  <a:tcPr>
                     <a:lnL w="6350" cap="flat" cmpd="sng" algn="ctr">
                       <a:solidFill>
                         <a:srgbClr val="E8EDF2"/>
@@ -3823,7 +3618,7 @@
                     <a:bodyPr/>
                     <a:lstStyle/>
                     <a:p>
-                      <a:pPr indent="0" marL="0">
+                      <a:pPr marL="0" indent="0">
                         <a:buNone/>
                       </a:pPr>
                       <a:r>
@@ -3844,7 +3639,7 @@
                       </a:endParaRPr>
                     </a:p>
                   </a:txBody>
-                  <a:tcPr marL="91440" marR="91440" marT="45720" marB="45720">
+                  <a:tcPr>
                     <a:lnL w="6350" cap="flat" cmpd="sng" algn="ctr">
                       <a:solidFill>
                         <a:srgbClr val="E8EDF2"/>
@@ -3888,7 +3683,7 @@
                     <a:bodyPr/>
                     <a:lstStyle/>
                     <a:p>
-                      <a:pPr indent="0" marL="0">
+                      <a:pPr marL="0" indent="0">
                         <a:buNone/>
                       </a:pPr>
                       <a:r>
@@ -3909,7 +3704,7 @@
                       </a:endParaRPr>
                     </a:p>
                   </a:txBody>
-                  <a:tcPr marL="91440" marR="91440" marT="45720" marB="45720">
+                  <a:tcPr>
                     <a:lnL w="6350" cap="flat" cmpd="sng" algn="ctr">
                       <a:solidFill>
                         <a:srgbClr val="E8EDF2"/>
@@ -3953,7 +3748,7 @@
                     <a:bodyPr/>
                     <a:lstStyle/>
                     <a:p>
-                      <a:pPr indent="0" marL="0">
+                      <a:pPr marL="0" indent="0">
                         <a:buNone/>
                       </a:pPr>
                       <a:r>
@@ -3974,7 +3769,7 @@
                       </a:endParaRPr>
                     </a:p>
                   </a:txBody>
-                  <a:tcPr marL="91440" marR="91440" marT="45720" marB="45720">
+                  <a:tcPr>
                     <a:lnL w="6350" cap="flat" cmpd="sng" algn="ctr">
                       <a:solidFill>
                         <a:srgbClr val="E8EDF2"/>
@@ -4013,6 +3808,11 @@
                     </a:lnB>
                   </a:tcPr>
                 </a:tc>
+                <a:extLst>
+                  <a:ext uri="{0D108BD9-81ED-4DB2-BD59-A6C34878D82A}">
+                    <a16:rowId xmlns:a16="http://schemas.microsoft.com/office/drawing/2014/main" val="10004"/>
+                  </a:ext>
+                </a:extLst>
               </a:tr>
             </a:tbl>
           </a:graphicData>
@@ -4034,6 +3834,7 @@
         <a:solidFill>
           <a:srgbClr val="F4F7F9"/>
         </a:solidFill>
+        <a:effectLst/>
       </p:bgPr>
     </p:bg>
     <p:spTree>
@@ -4121,7 +3922,7 @@
           <a:bodyPr wrap="square" lIns="0" tIns="0" rIns="0" bIns="0" rtlCol="0" anchor="ctr"/>
           <a:lstStyle/>
           <a:p>
-            <a:pPr indent="0" marL="0">
+            <a:pPr marL="0" indent="0">
               <a:buNone/>
             </a:pPr>
             <a:r>
@@ -4141,7 +3942,7 @@
       </p:sp>
       <p:graphicFrame>
         <p:nvGraphicFramePr>
-          <p:cNvPr id="4" name="Table 0"/>
+          <p:cNvPr id="5" name="Table 0"/>
           <p:cNvGraphicFramePr>
             <a:graphicFrameLocks noGrp="1"/>
           </p:cNvGraphicFramePr>
@@ -4155,17 +3956,41 @@
         </p:nvGraphicFramePr>
         <p:xfrm>
           <a:off x="320040" y="804672"/>
-          <a:ext cx="8503920" cy="3931920"/>
+          <a:ext cx="8046720" cy="3950208"/>
         </p:xfrm>
         <a:graphic>
           <a:graphicData uri="http://schemas.openxmlformats.org/drawingml/2006/table">
             <a:tbl>
               <a:tblPr/>
               <a:tblGrid>
-                <a:gridCol w="640080"/>
-                <a:gridCol w="2743200"/>
-                <a:gridCol w="2103120"/>
-                <a:gridCol w="2560320"/>
+                <a:gridCol w="640080">
+                  <a:extLst>
+                    <a:ext uri="{9D8B030D-6E8A-4147-A177-3AD203B41FA5}">
+                      <a16:colId xmlns:a16="http://schemas.microsoft.com/office/drawing/2014/main" val="20000"/>
+                    </a:ext>
+                  </a:extLst>
+                </a:gridCol>
+                <a:gridCol w="2743200">
+                  <a:extLst>
+                    <a:ext uri="{9D8B030D-6E8A-4147-A177-3AD203B41FA5}">
+                      <a16:colId xmlns:a16="http://schemas.microsoft.com/office/drawing/2014/main" val="20001"/>
+                    </a:ext>
+                  </a:extLst>
+                </a:gridCol>
+                <a:gridCol w="2103120">
+                  <a:extLst>
+                    <a:ext uri="{9D8B030D-6E8A-4147-A177-3AD203B41FA5}">
+                      <a16:colId xmlns:a16="http://schemas.microsoft.com/office/drawing/2014/main" val="20002"/>
+                    </a:ext>
+                  </a:extLst>
+                </a:gridCol>
+                <a:gridCol w="2560320">
+                  <a:extLst>
+                    <a:ext uri="{9D8B030D-6E8A-4147-A177-3AD203B41FA5}">
+                      <a16:colId xmlns:a16="http://schemas.microsoft.com/office/drawing/2014/main" val="20003"/>
+                    </a:ext>
+                  </a:extLst>
+                </a:gridCol>
               </a:tblGrid>
               <a:tr h="658368">
                 <a:tc>
@@ -4173,7 +3998,7 @@
                     <a:bodyPr/>
                     <a:lstStyle/>
                     <a:p>
-                      <a:pPr indent="0" marL="0">
+                      <a:pPr marL="0" indent="0">
                         <a:buNone/>
                       </a:pPr>
                       <a:r>
@@ -4194,7 +4019,7 @@
                       </a:endParaRPr>
                     </a:p>
                   </a:txBody>
-                  <a:tcPr marL="91440" marR="91440" marT="45720" marB="45720">
+                  <a:tcPr>
                     <a:lnL w="6350" cap="flat" cmpd="sng" algn="ctr">
                       <a:solidFill>
                         <a:srgbClr val="E8EDF2"/>
@@ -4241,7 +4066,7 @@
                     <a:bodyPr/>
                     <a:lstStyle/>
                     <a:p>
-                      <a:pPr indent="0" marL="0">
+                      <a:pPr marL="0" indent="0">
                         <a:buNone/>
                       </a:pPr>
                       <a:r>
@@ -4262,7 +4087,7 @@
                       </a:endParaRPr>
                     </a:p>
                   </a:txBody>
-                  <a:tcPr marL="91440" marR="91440" marT="45720" marB="45720">
+                  <a:tcPr>
                     <a:lnL w="6350" cap="flat" cmpd="sng" algn="ctr">
                       <a:solidFill>
                         <a:srgbClr val="E8EDF2"/>
@@ -4309,7 +4134,7 @@
                     <a:bodyPr/>
                     <a:lstStyle/>
                     <a:p>
-                      <a:pPr indent="0" marL="0">
+                      <a:pPr marL="0" indent="0">
                         <a:buNone/>
                       </a:pPr>
                       <a:r>
@@ -4330,7 +4155,7 @@
                       </a:endParaRPr>
                     </a:p>
                   </a:txBody>
-                  <a:tcPr marL="91440" marR="91440" marT="45720" marB="45720">
+                  <a:tcPr>
                     <a:lnL w="6350" cap="flat" cmpd="sng" algn="ctr">
                       <a:solidFill>
                         <a:srgbClr val="E8EDF2"/>
@@ -4377,7 +4202,7 @@
                     <a:bodyPr/>
                     <a:lstStyle/>
                     <a:p>
-                      <a:pPr indent="0" marL="0">
+                      <a:pPr marL="0" indent="0">
                         <a:buNone/>
                       </a:pPr>
                       <a:r>
@@ -4398,7 +4223,7 @@
                       </a:endParaRPr>
                     </a:p>
                   </a:txBody>
-                  <a:tcPr marL="91440" marR="91440" marT="45720" marB="45720">
+                  <a:tcPr>
                     <a:lnL w="6350" cap="flat" cmpd="sng" algn="ctr">
                       <a:solidFill>
                         <a:srgbClr val="E8EDF2"/>
@@ -4440,6 +4265,11 @@
                     </a:solidFill>
                   </a:tcPr>
                 </a:tc>
+                <a:extLst>
+                  <a:ext uri="{0D108BD9-81ED-4DB2-BD59-A6C34878D82A}">
+                    <a16:rowId xmlns:a16="http://schemas.microsoft.com/office/drawing/2014/main" val="10000"/>
+                  </a:ext>
+                </a:extLst>
               </a:tr>
               <a:tr h="658368">
                 <a:tc>
@@ -4447,7 +4277,7 @@
                     <a:bodyPr/>
                     <a:lstStyle/>
                     <a:p>
-                      <a:pPr indent="0" marL="0">
+                      <a:pPr marL="0" indent="0">
                         <a:buNone/>
                       </a:pPr>
                       <a:r>
@@ -4468,7 +4298,7 @@
                       </a:endParaRPr>
                     </a:p>
                   </a:txBody>
-                  <a:tcPr marL="91440" marR="91440" marT="45720" marB="45720">
+                  <a:tcPr>
                     <a:lnL w="6350" cap="flat" cmpd="sng" algn="ctr">
                       <a:solidFill>
                         <a:srgbClr val="E8EDF2"/>
@@ -4512,7 +4342,7 @@
                     <a:bodyPr/>
                     <a:lstStyle/>
                     <a:p>
-                      <a:pPr indent="0" marL="0">
+                      <a:pPr marL="0" indent="0">
                         <a:buNone/>
                       </a:pPr>
                       <a:r>
@@ -4533,7 +4363,7 @@
                       </a:endParaRPr>
                     </a:p>
                   </a:txBody>
-                  <a:tcPr marL="91440" marR="91440" marT="45720" marB="45720">
+                  <a:tcPr>
                     <a:lnL w="6350" cap="flat" cmpd="sng" algn="ctr">
                       <a:solidFill>
                         <a:srgbClr val="E8EDF2"/>
@@ -4577,7 +4407,7 @@
                     <a:bodyPr/>
                     <a:lstStyle/>
                     <a:p>
-                      <a:pPr indent="0" marL="0">
+                      <a:pPr marL="0" indent="0">
                         <a:buNone/>
                       </a:pPr>
                       <a:r>
@@ -4598,7 +4428,7 @@
                       </a:endParaRPr>
                     </a:p>
                   </a:txBody>
-                  <a:tcPr marL="91440" marR="91440" marT="45720" marB="45720">
+                  <a:tcPr>
                     <a:lnL w="6350" cap="flat" cmpd="sng" algn="ctr">
                       <a:solidFill>
                         <a:srgbClr val="E8EDF2"/>
@@ -4642,7 +4472,7 @@
                     <a:bodyPr/>
                     <a:lstStyle/>
                     <a:p>
-                      <a:pPr indent="0" marL="0">
+                      <a:pPr marL="0" indent="0">
                         <a:buNone/>
                       </a:pPr>
                       <a:r>
@@ -4663,7 +4493,7 @@
                       </a:endParaRPr>
                     </a:p>
                   </a:txBody>
-                  <a:tcPr marL="91440" marR="91440" marT="45720" marB="45720">
+                  <a:tcPr>
                     <a:lnL w="6350" cap="flat" cmpd="sng" algn="ctr">
                       <a:solidFill>
                         <a:srgbClr val="E8EDF2"/>
@@ -4702,6 +4532,11 @@
                     </a:lnB>
                   </a:tcPr>
                 </a:tc>
+                <a:extLst>
+                  <a:ext uri="{0D108BD9-81ED-4DB2-BD59-A6C34878D82A}">
+                    <a16:rowId xmlns:a16="http://schemas.microsoft.com/office/drawing/2014/main" val="10001"/>
+                  </a:ext>
+                </a:extLst>
               </a:tr>
               <a:tr h="658368">
                 <a:tc>
@@ -4709,7 +4544,7 @@
                     <a:bodyPr/>
                     <a:lstStyle/>
                     <a:p>
-                      <a:pPr indent="0" marL="0">
+                      <a:pPr marL="0" indent="0">
                         <a:buNone/>
                       </a:pPr>
                       <a:r>
@@ -4730,7 +4565,7 @@
                       </a:endParaRPr>
                     </a:p>
                   </a:txBody>
-                  <a:tcPr marL="91440" marR="91440" marT="45720" marB="45720">
+                  <a:tcPr>
                     <a:lnL w="6350" cap="flat" cmpd="sng" algn="ctr">
                       <a:solidFill>
                         <a:srgbClr val="E8EDF2"/>
@@ -4774,7 +4609,7 @@
                     <a:bodyPr/>
                     <a:lstStyle/>
                     <a:p>
-                      <a:pPr indent="0" marL="0">
+                      <a:pPr marL="0" indent="0">
                         <a:buNone/>
                       </a:pPr>
                       <a:r>
@@ -4795,7 +4630,7 @@
                       </a:endParaRPr>
                     </a:p>
                   </a:txBody>
-                  <a:tcPr marL="91440" marR="91440" marT="45720" marB="45720">
+                  <a:tcPr>
                     <a:lnL w="6350" cap="flat" cmpd="sng" algn="ctr">
                       <a:solidFill>
                         <a:srgbClr val="E8EDF2"/>
@@ -4839,7 +4674,7 @@
                     <a:bodyPr/>
                     <a:lstStyle/>
                     <a:p>
-                      <a:pPr indent="0" marL="0">
+                      <a:pPr marL="0" indent="0">
                         <a:buNone/>
                       </a:pPr>
                       <a:r>
@@ -4860,7 +4695,7 @@
                       </a:endParaRPr>
                     </a:p>
                   </a:txBody>
-                  <a:tcPr marL="91440" marR="91440" marT="45720" marB="45720">
+                  <a:tcPr>
                     <a:lnL w="6350" cap="flat" cmpd="sng" algn="ctr">
                       <a:solidFill>
                         <a:srgbClr val="E8EDF2"/>
@@ -4904,7 +4739,7 @@
                     <a:bodyPr/>
                     <a:lstStyle/>
                     <a:p>
-                      <a:pPr indent="0" marL="0">
+                      <a:pPr marL="0" indent="0">
                         <a:buNone/>
                       </a:pPr>
                       <a:r>
@@ -4925,7 +4760,7 @@
                       </a:endParaRPr>
                     </a:p>
                   </a:txBody>
-                  <a:tcPr marL="91440" marR="91440" marT="45720" marB="45720">
+                  <a:tcPr>
                     <a:lnL w="6350" cap="flat" cmpd="sng" algn="ctr">
                       <a:solidFill>
                         <a:srgbClr val="E8EDF2"/>
@@ -4964,6 +4799,11 @@
                     </a:lnB>
                   </a:tcPr>
                 </a:tc>
+                <a:extLst>
+                  <a:ext uri="{0D108BD9-81ED-4DB2-BD59-A6C34878D82A}">
+                    <a16:rowId xmlns:a16="http://schemas.microsoft.com/office/drawing/2014/main" val="10002"/>
+                  </a:ext>
+                </a:extLst>
               </a:tr>
               <a:tr h="658368">
                 <a:tc>
@@ -4971,7 +4811,7 @@
                     <a:bodyPr/>
                     <a:lstStyle/>
                     <a:p>
-                      <a:pPr indent="0" marL="0">
+                      <a:pPr marL="0" indent="0">
                         <a:buNone/>
                       </a:pPr>
                       <a:r>
@@ -4992,7 +4832,7 @@
                       </a:endParaRPr>
                     </a:p>
                   </a:txBody>
-                  <a:tcPr marL="91440" marR="91440" marT="45720" marB="45720">
+                  <a:tcPr>
                     <a:lnL w="6350" cap="flat" cmpd="sng" algn="ctr">
                       <a:solidFill>
                         <a:srgbClr val="E8EDF2"/>
@@ -5036,7 +4876,7 @@
                     <a:bodyPr/>
                     <a:lstStyle/>
                     <a:p>
-                      <a:pPr indent="0" marL="0">
+                      <a:pPr marL="0" indent="0">
                         <a:buNone/>
                       </a:pPr>
                       <a:r>
@@ -5057,7 +4897,7 @@
                       </a:endParaRPr>
                     </a:p>
                   </a:txBody>
-                  <a:tcPr marL="91440" marR="91440" marT="45720" marB="45720">
+                  <a:tcPr>
                     <a:lnL w="6350" cap="flat" cmpd="sng" algn="ctr">
                       <a:solidFill>
                         <a:srgbClr val="E8EDF2"/>
@@ -5101,7 +4941,7 @@
                     <a:bodyPr/>
                     <a:lstStyle/>
                     <a:p>
-                      <a:pPr indent="0" marL="0">
+                      <a:pPr marL="0" indent="0">
                         <a:buNone/>
                       </a:pPr>
                       <a:r>
@@ -5122,7 +4962,7 @@
                       </a:endParaRPr>
                     </a:p>
                   </a:txBody>
-                  <a:tcPr marL="91440" marR="91440" marT="45720" marB="45720">
+                  <a:tcPr>
                     <a:lnL w="6350" cap="flat" cmpd="sng" algn="ctr">
                       <a:solidFill>
                         <a:srgbClr val="E8EDF2"/>
@@ -5166,7 +5006,7 @@
                     <a:bodyPr/>
                     <a:lstStyle/>
                     <a:p>
-                      <a:pPr indent="0" marL="0">
+                      <a:pPr marL="0" indent="0">
                         <a:buNone/>
                       </a:pPr>
                       <a:r>
@@ -5187,7 +5027,7 @@
                       </a:endParaRPr>
                     </a:p>
                   </a:txBody>
-                  <a:tcPr marL="91440" marR="91440" marT="45720" marB="45720">
+                  <a:tcPr>
                     <a:lnL w="6350" cap="flat" cmpd="sng" algn="ctr">
                       <a:solidFill>
                         <a:srgbClr val="E8EDF2"/>
@@ -5226,6 +5066,11 @@
                     </a:lnB>
                   </a:tcPr>
                 </a:tc>
+                <a:extLst>
+                  <a:ext uri="{0D108BD9-81ED-4DB2-BD59-A6C34878D82A}">
+                    <a16:rowId xmlns:a16="http://schemas.microsoft.com/office/drawing/2014/main" val="10003"/>
+                  </a:ext>
+                </a:extLst>
               </a:tr>
               <a:tr h="658368">
                 <a:tc>
@@ -5233,7 +5078,7 @@
                     <a:bodyPr/>
                     <a:lstStyle/>
                     <a:p>
-                      <a:pPr indent="0" marL="0">
+                      <a:pPr marL="0" indent="0">
                         <a:buNone/>
                       </a:pPr>
                       <a:r>
@@ -5254,7 +5099,7 @@
                       </a:endParaRPr>
                     </a:p>
                   </a:txBody>
-                  <a:tcPr marL="91440" marR="91440" marT="45720" marB="45720">
+                  <a:tcPr>
                     <a:lnL w="6350" cap="flat" cmpd="sng" algn="ctr">
                       <a:solidFill>
                         <a:srgbClr val="E8EDF2"/>
@@ -5298,7 +5143,7 @@
                     <a:bodyPr/>
                     <a:lstStyle/>
                     <a:p>
-                      <a:pPr indent="0" marL="0">
+                      <a:pPr marL="0" indent="0">
                         <a:buNone/>
                       </a:pPr>
                       <a:r>
@@ -5319,7 +5164,7 @@
                       </a:endParaRPr>
                     </a:p>
                   </a:txBody>
-                  <a:tcPr marL="91440" marR="91440" marT="45720" marB="45720">
+                  <a:tcPr>
                     <a:lnL w="6350" cap="flat" cmpd="sng" algn="ctr">
                       <a:solidFill>
                         <a:srgbClr val="E8EDF2"/>
@@ -5363,7 +5208,7 @@
                     <a:bodyPr/>
                     <a:lstStyle/>
                     <a:p>
-                      <a:pPr indent="0" marL="0">
+                      <a:pPr marL="0" indent="0">
                         <a:buNone/>
                       </a:pPr>
                       <a:r>
@@ -5384,7 +5229,7 @@
                       </a:endParaRPr>
                     </a:p>
                   </a:txBody>
-                  <a:tcPr marL="91440" marR="91440" marT="45720" marB="45720">
+                  <a:tcPr>
                     <a:lnL w="6350" cap="flat" cmpd="sng" algn="ctr">
                       <a:solidFill>
                         <a:srgbClr val="E8EDF2"/>
@@ -5428,7 +5273,7 @@
                     <a:bodyPr/>
                     <a:lstStyle/>
                     <a:p>
-                      <a:pPr indent="0" marL="0">
+                      <a:pPr marL="0" indent="0">
                         <a:buNone/>
                       </a:pPr>
                       <a:r>
@@ -5449,7 +5294,7 @@
                       </a:endParaRPr>
                     </a:p>
                   </a:txBody>
-                  <a:tcPr marL="91440" marR="91440" marT="45720" marB="45720">
+                  <a:tcPr>
                     <a:lnL w="6350" cap="flat" cmpd="sng" algn="ctr">
                       <a:solidFill>
                         <a:srgbClr val="E8EDF2"/>
@@ -5488,6 +5333,11 @@
                     </a:lnB>
                   </a:tcPr>
                 </a:tc>
+                <a:extLst>
+                  <a:ext uri="{0D108BD9-81ED-4DB2-BD59-A6C34878D82A}">
+                    <a16:rowId xmlns:a16="http://schemas.microsoft.com/office/drawing/2014/main" val="10004"/>
+                  </a:ext>
+                </a:extLst>
               </a:tr>
               <a:tr h="658368">
                 <a:tc>
@@ -5495,7 +5345,7 @@
                     <a:bodyPr/>
                     <a:lstStyle/>
                     <a:p>
-                      <a:pPr indent="0" marL="0">
+                      <a:pPr marL="0" indent="0">
                         <a:buNone/>
                       </a:pPr>
                       <a:r>
@@ -5516,7 +5366,7 @@
                       </a:endParaRPr>
                     </a:p>
                   </a:txBody>
-                  <a:tcPr marL="91440" marR="91440" marT="45720" marB="45720">
+                  <a:tcPr>
                     <a:lnL w="6350" cap="flat" cmpd="sng" algn="ctr">
                       <a:solidFill>
                         <a:srgbClr val="E8EDF2"/>
@@ -5560,7 +5410,7 @@
                     <a:bodyPr/>
                     <a:lstStyle/>
                     <a:p>
-                      <a:pPr indent="0" marL="0">
+                      <a:pPr marL="0" indent="0">
                         <a:buNone/>
                       </a:pPr>
                       <a:r>
@@ -5581,7 +5431,7 @@
                       </a:endParaRPr>
                     </a:p>
                   </a:txBody>
-                  <a:tcPr marL="91440" marR="91440" marT="45720" marB="45720">
+                  <a:tcPr>
                     <a:lnL w="6350" cap="flat" cmpd="sng" algn="ctr">
                       <a:solidFill>
                         <a:srgbClr val="E8EDF2"/>
@@ -5625,7 +5475,7 @@
                     <a:bodyPr/>
                     <a:lstStyle/>
                     <a:p>
-                      <a:pPr indent="0" marL="0">
+                      <a:pPr marL="0" indent="0">
                         <a:buNone/>
                       </a:pPr>
                       <a:r>
@@ -5646,7 +5496,7 @@
                       </a:endParaRPr>
                     </a:p>
                   </a:txBody>
-                  <a:tcPr marL="91440" marR="91440" marT="45720" marB="45720">
+                  <a:tcPr>
                     <a:lnL w="6350" cap="flat" cmpd="sng" algn="ctr">
                       <a:solidFill>
                         <a:srgbClr val="E8EDF2"/>
@@ -5690,7 +5540,7 @@
                     <a:bodyPr/>
                     <a:lstStyle/>
                     <a:p>
-                      <a:pPr indent="0" marL="0">
+                      <a:pPr marL="0" indent="0">
                         <a:buNone/>
                       </a:pPr>
                       <a:r>
@@ -5711,7 +5561,7 @@
                       </a:endParaRPr>
                     </a:p>
                   </a:txBody>
-                  <a:tcPr marL="91440" marR="91440" marT="45720" marB="45720">
+                  <a:tcPr>
                     <a:lnL w="6350" cap="flat" cmpd="sng" algn="ctr">
                       <a:solidFill>
                         <a:srgbClr val="E8EDF2"/>
@@ -5750,6 +5600,11 @@
                     </a:lnB>
                   </a:tcPr>
                 </a:tc>
+                <a:extLst>
+                  <a:ext uri="{0D108BD9-81ED-4DB2-BD59-A6C34878D82A}">
+                    <a16:rowId xmlns:a16="http://schemas.microsoft.com/office/drawing/2014/main" val="10005"/>
+                  </a:ext>
+                </a:extLst>
               </a:tr>
             </a:tbl>
           </a:graphicData>
@@ -5771,6 +5626,7 @@
         <a:solidFill>
           <a:srgbClr val="F4F7F9"/>
         </a:solidFill>
+        <a:effectLst/>
       </p:bgPr>
     </p:bg>
     <p:spTree>
@@ -5858,7 +5714,7 @@
           <a:bodyPr wrap="square" lIns="0" tIns="0" rIns="0" bIns="0" rtlCol="0" anchor="ctr"/>
           <a:lstStyle/>
           <a:p>
-            <a:pPr indent="0" marL="0">
+            <a:pPr marL="0" indent="0">
               <a:buNone/>
             </a:pPr>
             <a:r>
@@ -5878,7 +5734,7 @@
       </p:sp>
       <p:graphicFrame>
         <p:nvGraphicFramePr>
-          <p:cNvPr id="5" name="Chart 0" descr=""/>
+          <p:cNvPr id="5" name="Chart 0"/>
           <p:cNvGraphicFramePr/>
           <p:nvPr/>
         </p:nvGraphicFramePr>
@@ -5886,9 +5742,9 @@
           <a:off x="320040" y="777240"/>
           <a:ext cx="8503920" cy="4023360"/>
         </p:xfrm>
-        <a:graphic xmlns:a="http://schemas.openxmlformats.org/drawingml/2006/main">
+        <a:graphic>
           <a:graphicData uri="http://schemas.openxmlformats.org/drawingml/2006/chart">
-            <c:chart xmlns:c="http://schemas.openxmlformats.org/drawingml/2006/chart" r:id="rId1"/>
+            <c:chart xmlns:c="http://schemas.openxmlformats.org/drawingml/2006/chart" xmlns:r="http://schemas.openxmlformats.org/officeDocument/2006/relationships" r:id="rId3"/>
           </a:graphicData>
         </a:graphic>
       </p:graphicFrame>
@@ -5908,6 +5764,7 @@
         <a:solidFill>
           <a:srgbClr val="F4F7F9"/>
         </a:solidFill>
+        <a:effectLst/>
       </p:bgPr>
     </p:bg>
     <p:spTree>
@@ -5995,7 +5852,7 @@
           <a:bodyPr wrap="square" lIns="0" tIns="0" rIns="0" bIns="0" rtlCol="0" anchor="ctr"/>
           <a:lstStyle/>
           <a:p>
-            <a:pPr indent="0" marL="0">
+            <a:pPr marL="0" indent="0">
               <a:buNone/>
             </a:pPr>
             <a:r>
@@ -6029,17 +5886,41 @@
         </p:nvGraphicFramePr>
         <p:xfrm>
           <a:off x="320040" y="804672"/>
-          <a:ext cx="8503920" cy="4069080"/>
+          <a:ext cx="8138160" cy="4389120"/>
         </p:xfrm>
         <a:graphic>
           <a:graphicData uri="http://schemas.openxmlformats.org/drawingml/2006/table">
             <a:tbl>
               <a:tblPr/>
               <a:tblGrid>
-                <a:gridCol w="1920240"/>
-                <a:gridCol w="822960"/>
-                <a:gridCol w="3108960"/>
-                <a:gridCol w="2286000"/>
+                <a:gridCol w="1920240">
+                  <a:extLst>
+                    <a:ext uri="{9D8B030D-6E8A-4147-A177-3AD203B41FA5}">
+                      <a16:colId xmlns:a16="http://schemas.microsoft.com/office/drawing/2014/main" val="20000"/>
+                    </a:ext>
+                  </a:extLst>
+                </a:gridCol>
+                <a:gridCol w="822960">
+                  <a:extLst>
+                    <a:ext uri="{9D8B030D-6E8A-4147-A177-3AD203B41FA5}">
+                      <a16:colId xmlns:a16="http://schemas.microsoft.com/office/drawing/2014/main" val="20001"/>
+                    </a:ext>
+                  </a:extLst>
+                </a:gridCol>
+                <a:gridCol w="3108960">
+                  <a:extLst>
+                    <a:ext uri="{9D8B030D-6E8A-4147-A177-3AD203B41FA5}">
+                      <a16:colId xmlns:a16="http://schemas.microsoft.com/office/drawing/2014/main" val="20002"/>
+                    </a:ext>
+                  </a:extLst>
+                </a:gridCol>
+                <a:gridCol w="2286000">
+                  <a:extLst>
+                    <a:ext uri="{9D8B030D-6E8A-4147-A177-3AD203B41FA5}">
+                      <a16:colId xmlns:a16="http://schemas.microsoft.com/office/drawing/2014/main" val="20003"/>
+                    </a:ext>
+                  </a:extLst>
+                </a:gridCol>
               </a:tblGrid>
               <a:tr h="548640">
                 <a:tc>
@@ -6047,7 +5928,7 @@
                     <a:bodyPr/>
                     <a:lstStyle/>
                     <a:p>
-                      <a:pPr indent="0" marL="0">
+                      <a:pPr marL="0" indent="0">
                         <a:buNone/>
                       </a:pPr>
                       <a:r>
@@ -6068,7 +5949,7 @@
                       </a:endParaRPr>
                     </a:p>
                   </a:txBody>
-                  <a:tcPr marL="91440" marR="91440" marT="45720" marB="45720">
+                  <a:tcPr>
                     <a:lnL w="6350" cap="flat" cmpd="sng" algn="ctr">
                       <a:solidFill>
                         <a:srgbClr val="E8EDF2"/>
@@ -6115,7 +5996,7 @@
                     <a:bodyPr/>
                     <a:lstStyle/>
                     <a:p>
-                      <a:pPr indent="0" marL="0">
+                      <a:pPr marL="0" indent="0">
                         <a:buNone/>
                       </a:pPr>
                       <a:r>
@@ -6136,7 +6017,7 @@
                       </a:endParaRPr>
                     </a:p>
                   </a:txBody>
-                  <a:tcPr marL="91440" marR="91440" marT="45720" marB="45720">
+                  <a:tcPr>
                     <a:lnL w="6350" cap="flat" cmpd="sng" algn="ctr">
                       <a:solidFill>
                         <a:srgbClr val="E8EDF2"/>
@@ -6183,7 +6064,7 @@
                     <a:bodyPr/>
                     <a:lstStyle/>
                     <a:p>
-                      <a:pPr indent="0" marL="0">
+                      <a:pPr marL="0" indent="0">
                         <a:buNone/>
                       </a:pPr>
                       <a:r>
@@ -6204,7 +6085,7 @@
                       </a:endParaRPr>
                     </a:p>
                   </a:txBody>
-                  <a:tcPr marL="91440" marR="91440" marT="45720" marB="45720">
+                  <a:tcPr>
                     <a:lnL w="6350" cap="flat" cmpd="sng" algn="ctr">
                       <a:solidFill>
                         <a:srgbClr val="E8EDF2"/>
@@ -6251,7 +6132,7 @@
                     <a:bodyPr/>
                     <a:lstStyle/>
                     <a:p>
-                      <a:pPr indent="0" marL="0">
+                      <a:pPr marL="0" indent="0">
                         <a:buNone/>
                       </a:pPr>
                       <a:r>
@@ -6272,7 +6153,7 @@
                       </a:endParaRPr>
                     </a:p>
                   </a:txBody>
-                  <a:tcPr marL="91440" marR="91440" marT="45720" marB="45720">
+                  <a:tcPr>
                     <a:lnL w="6350" cap="flat" cmpd="sng" algn="ctr">
                       <a:solidFill>
                         <a:srgbClr val="E8EDF2"/>
@@ -6314,6 +6195,11 @@
                     </a:solidFill>
                   </a:tcPr>
                 </a:tc>
+                <a:extLst>
+                  <a:ext uri="{0D108BD9-81ED-4DB2-BD59-A6C34878D82A}">
+                    <a16:rowId xmlns:a16="http://schemas.microsoft.com/office/drawing/2014/main" val="10000"/>
+                  </a:ext>
+                </a:extLst>
               </a:tr>
               <a:tr h="548640">
                 <a:tc>
@@ -6321,7 +6207,7 @@
                     <a:bodyPr/>
                     <a:lstStyle/>
                     <a:p>
-                      <a:pPr indent="0" marL="0">
+                      <a:pPr marL="0" indent="0">
                         <a:buNone/>
                       </a:pPr>
                       <a:r>
@@ -6342,7 +6228,7 @@
                       </a:endParaRPr>
                     </a:p>
                   </a:txBody>
-                  <a:tcPr marL="91440" marR="91440" marT="45720" marB="45720">
+                  <a:tcPr>
                     <a:lnL w="6350" cap="flat" cmpd="sng" algn="ctr">
                       <a:solidFill>
                         <a:srgbClr val="E8EDF2"/>
@@ -6386,7 +6272,7 @@
                     <a:bodyPr/>
                     <a:lstStyle/>
                     <a:p>
-                      <a:pPr indent="0" marL="0">
+                      <a:pPr marL="0" indent="0">
                         <a:buNone/>
                       </a:pPr>
                       <a:r>
@@ -6407,7 +6293,7 @@
                       </a:endParaRPr>
                     </a:p>
                   </a:txBody>
-                  <a:tcPr marL="91440" marR="91440" marT="45720" marB="45720">
+                  <a:tcPr>
                     <a:lnL w="6350" cap="flat" cmpd="sng" algn="ctr">
                       <a:solidFill>
                         <a:srgbClr val="E8EDF2"/>
@@ -6451,7 +6337,7 @@
                     <a:bodyPr/>
                     <a:lstStyle/>
                     <a:p>
-                      <a:pPr indent="0" marL="0">
+                      <a:pPr marL="0" indent="0">
                         <a:buNone/>
                       </a:pPr>
                       <a:r>
@@ -6472,7 +6358,7 @@
                       </a:endParaRPr>
                     </a:p>
                   </a:txBody>
-                  <a:tcPr marL="91440" marR="91440" marT="45720" marB="45720">
+                  <a:tcPr>
                     <a:lnL w="6350" cap="flat" cmpd="sng" algn="ctr">
                       <a:solidFill>
                         <a:srgbClr val="E8EDF2"/>
@@ -6516,7 +6402,7 @@
                     <a:bodyPr/>
                     <a:lstStyle/>
                     <a:p>
-                      <a:pPr indent="0" marL="0">
+                      <a:pPr marL="0" indent="0">
                         <a:buNone/>
                       </a:pPr>
                       <a:r>
@@ -6537,7 +6423,7 @@
                       </a:endParaRPr>
                     </a:p>
                   </a:txBody>
-                  <a:tcPr marL="91440" marR="91440" marT="45720" marB="45720">
+                  <a:tcPr>
                     <a:lnL w="6350" cap="flat" cmpd="sng" algn="ctr">
                       <a:solidFill>
                         <a:srgbClr val="E8EDF2"/>
@@ -6576,6 +6462,11 @@
                     </a:lnB>
                   </a:tcPr>
                 </a:tc>
+                <a:extLst>
+                  <a:ext uri="{0D108BD9-81ED-4DB2-BD59-A6C34878D82A}">
+                    <a16:rowId xmlns:a16="http://schemas.microsoft.com/office/drawing/2014/main" val="10001"/>
+                  </a:ext>
+                </a:extLst>
               </a:tr>
               <a:tr h="548640">
                 <a:tc>
@@ -6583,7 +6474,7 @@
                     <a:bodyPr/>
                     <a:lstStyle/>
                     <a:p>
-                      <a:pPr indent="0" marL="0">
+                      <a:pPr marL="0" indent="0">
                         <a:buNone/>
                       </a:pPr>
                       <a:r>
@@ -6604,7 +6495,7 @@
                       </a:endParaRPr>
                     </a:p>
                   </a:txBody>
-                  <a:tcPr marL="91440" marR="91440" marT="45720" marB="45720">
+                  <a:tcPr>
                     <a:lnL w="6350" cap="flat" cmpd="sng" algn="ctr">
                       <a:solidFill>
                         <a:srgbClr val="E8EDF2"/>
@@ -6648,7 +6539,7 @@
                     <a:bodyPr/>
                     <a:lstStyle/>
                     <a:p>
-                      <a:pPr indent="0" marL="0">
+                      <a:pPr marL="0" indent="0">
                         <a:buNone/>
                       </a:pPr>
                       <a:r>
@@ -6669,7 +6560,7 @@
                       </a:endParaRPr>
                     </a:p>
                   </a:txBody>
-                  <a:tcPr marL="91440" marR="91440" marT="45720" marB="45720">
+                  <a:tcPr>
                     <a:lnL w="6350" cap="flat" cmpd="sng" algn="ctr">
                       <a:solidFill>
                         <a:srgbClr val="E8EDF2"/>
@@ -6713,7 +6604,7 @@
                     <a:bodyPr/>
                     <a:lstStyle/>
                     <a:p>
-                      <a:pPr indent="0" marL="0">
+                      <a:pPr marL="0" indent="0">
                         <a:buNone/>
                       </a:pPr>
                       <a:r>
@@ -6734,7 +6625,7 @@
                       </a:endParaRPr>
                     </a:p>
                   </a:txBody>
-                  <a:tcPr marL="91440" marR="91440" marT="45720" marB="45720">
+                  <a:tcPr>
                     <a:lnL w="6350" cap="flat" cmpd="sng" algn="ctr">
                       <a:solidFill>
                         <a:srgbClr val="E8EDF2"/>
@@ -6778,7 +6669,7 @@
                     <a:bodyPr/>
                     <a:lstStyle/>
                     <a:p>
-                      <a:pPr indent="0" marL="0">
+                      <a:pPr marL="0" indent="0">
                         <a:buNone/>
                       </a:pPr>
                       <a:r>
@@ -6799,7 +6690,7 @@
                       </a:endParaRPr>
                     </a:p>
                   </a:txBody>
-                  <a:tcPr marL="91440" marR="91440" marT="45720" marB="45720">
+                  <a:tcPr>
                     <a:lnL w="6350" cap="flat" cmpd="sng" algn="ctr">
                       <a:solidFill>
                         <a:srgbClr val="E8EDF2"/>
@@ -6838,6 +6729,11 @@
                     </a:lnB>
                   </a:tcPr>
                 </a:tc>
+                <a:extLst>
+                  <a:ext uri="{0D108BD9-81ED-4DB2-BD59-A6C34878D82A}">
+                    <a16:rowId xmlns:a16="http://schemas.microsoft.com/office/drawing/2014/main" val="10002"/>
+                  </a:ext>
+                </a:extLst>
               </a:tr>
               <a:tr h="548640">
                 <a:tc>
@@ -6845,7 +6741,7 @@
                     <a:bodyPr/>
                     <a:lstStyle/>
                     <a:p>
-                      <a:pPr indent="0" marL="0">
+                      <a:pPr marL="0" indent="0">
                         <a:buNone/>
                       </a:pPr>
                       <a:r>
@@ -6866,7 +6762,7 @@
                       </a:endParaRPr>
                     </a:p>
                   </a:txBody>
-                  <a:tcPr marL="91440" marR="91440" marT="45720" marB="45720">
+                  <a:tcPr>
                     <a:lnL w="6350" cap="flat" cmpd="sng" algn="ctr">
                       <a:solidFill>
                         <a:srgbClr val="E8EDF2"/>
@@ -6910,7 +6806,7 @@
                     <a:bodyPr/>
                     <a:lstStyle/>
                     <a:p>
-                      <a:pPr indent="0" marL="0">
+                      <a:pPr marL="0" indent="0">
                         <a:buNone/>
                       </a:pPr>
                       <a:r>
@@ -6931,7 +6827,7 @@
                       </a:endParaRPr>
                     </a:p>
                   </a:txBody>
-                  <a:tcPr marL="91440" marR="91440" marT="45720" marB="45720">
+                  <a:tcPr>
                     <a:lnL w="6350" cap="flat" cmpd="sng" algn="ctr">
                       <a:solidFill>
                         <a:srgbClr val="E8EDF2"/>
@@ -6975,7 +6871,7 @@
                     <a:bodyPr/>
                     <a:lstStyle/>
                     <a:p>
-                      <a:pPr indent="0" marL="0">
+                      <a:pPr marL="0" indent="0">
                         <a:buNone/>
                       </a:pPr>
                       <a:r>
@@ -6996,7 +6892,7 @@
                       </a:endParaRPr>
                     </a:p>
                   </a:txBody>
-                  <a:tcPr marL="91440" marR="91440" marT="45720" marB="45720">
+                  <a:tcPr>
                     <a:lnL w="6350" cap="flat" cmpd="sng" algn="ctr">
                       <a:solidFill>
                         <a:srgbClr val="E8EDF2"/>
@@ -7040,7 +6936,7 @@
                     <a:bodyPr/>
                     <a:lstStyle/>
                     <a:p>
-                      <a:pPr indent="0" marL="0">
+                      <a:pPr marL="0" indent="0">
                         <a:buNone/>
                       </a:pPr>
                       <a:r>
@@ -7061,7 +6957,7 @@
                       </a:endParaRPr>
                     </a:p>
                   </a:txBody>
-                  <a:tcPr marL="91440" marR="91440" marT="45720" marB="45720">
+                  <a:tcPr>
                     <a:lnL w="6350" cap="flat" cmpd="sng" algn="ctr">
                       <a:solidFill>
                         <a:srgbClr val="E8EDF2"/>
@@ -7100,6 +6996,11 @@
                     </a:lnB>
                   </a:tcPr>
                 </a:tc>
+                <a:extLst>
+                  <a:ext uri="{0D108BD9-81ED-4DB2-BD59-A6C34878D82A}">
+                    <a16:rowId xmlns:a16="http://schemas.microsoft.com/office/drawing/2014/main" val="10003"/>
+                  </a:ext>
+                </a:extLst>
               </a:tr>
               <a:tr h="548640">
                 <a:tc>
@@ -7107,7 +7008,7 @@
                     <a:bodyPr/>
                     <a:lstStyle/>
                     <a:p>
-                      <a:pPr indent="0" marL="0">
+                      <a:pPr marL="0" indent="0">
                         <a:buNone/>
                       </a:pPr>
                       <a:r>
@@ -7128,7 +7029,7 @@
                       </a:endParaRPr>
                     </a:p>
                   </a:txBody>
-                  <a:tcPr marL="91440" marR="91440" marT="45720" marB="45720">
+                  <a:tcPr>
                     <a:lnL w="6350" cap="flat" cmpd="sng" algn="ctr">
                       <a:solidFill>
                         <a:srgbClr val="E8EDF2"/>
@@ -7172,7 +7073,7 @@
                     <a:bodyPr/>
                     <a:lstStyle/>
                     <a:p>
-                      <a:pPr indent="0" marL="0">
+                      <a:pPr marL="0" indent="0">
                         <a:buNone/>
                       </a:pPr>
                       <a:r>
@@ -7193,7 +7094,7 @@
                       </a:endParaRPr>
                     </a:p>
                   </a:txBody>
-                  <a:tcPr marL="91440" marR="91440" marT="45720" marB="45720">
+                  <a:tcPr>
                     <a:lnL w="6350" cap="flat" cmpd="sng" algn="ctr">
                       <a:solidFill>
                         <a:srgbClr val="E8EDF2"/>
@@ -7237,7 +7138,7 @@
                     <a:bodyPr/>
                     <a:lstStyle/>
                     <a:p>
-                      <a:pPr indent="0" marL="0">
+                      <a:pPr marL="0" indent="0">
                         <a:buNone/>
                       </a:pPr>
                       <a:r>
@@ -7258,7 +7159,7 @@
                       </a:endParaRPr>
                     </a:p>
                   </a:txBody>
-                  <a:tcPr marL="91440" marR="91440" marT="45720" marB="45720">
+                  <a:tcPr>
                     <a:lnL w="6350" cap="flat" cmpd="sng" algn="ctr">
                       <a:solidFill>
                         <a:srgbClr val="E8EDF2"/>
@@ -7302,7 +7203,7 @@
                     <a:bodyPr/>
                     <a:lstStyle/>
                     <a:p>
-                      <a:pPr indent="0" marL="0">
+                      <a:pPr marL="0" indent="0">
                         <a:buNone/>
                       </a:pPr>
                       <a:r>
@@ -7323,7 +7224,7 @@
                       </a:endParaRPr>
                     </a:p>
                   </a:txBody>
-                  <a:tcPr marL="91440" marR="91440" marT="45720" marB="45720">
+                  <a:tcPr>
                     <a:lnL w="6350" cap="flat" cmpd="sng" algn="ctr">
                       <a:solidFill>
                         <a:srgbClr val="E8EDF2"/>
@@ -7362,6 +7263,11 @@
                     </a:lnB>
                   </a:tcPr>
                 </a:tc>
+                <a:extLst>
+                  <a:ext uri="{0D108BD9-81ED-4DB2-BD59-A6C34878D82A}">
+                    <a16:rowId xmlns:a16="http://schemas.microsoft.com/office/drawing/2014/main" val="10004"/>
+                  </a:ext>
+                </a:extLst>
               </a:tr>
               <a:tr h="548640">
                 <a:tc>
@@ -7369,7 +7275,7 @@
                     <a:bodyPr/>
                     <a:lstStyle/>
                     <a:p>
-                      <a:pPr indent="0" marL="0">
+                      <a:pPr marL="0" indent="0">
                         <a:buNone/>
                       </a:pPr>
                       <a:r>
@@ -7390,7 +7296,7 @@
                       </a:endParaRPr>
                     </a:p>
                   </a:txBody>
-                  <a:tcPr marL="91440" marR="91440" marT="45720" marB="45720">
+                  <a:tcPr>
                     <a:lnL w="6350" cap="flat" cmpd="sng" algn="ctr">
                       <a:solidFill>
                         <a:srgbClr val="E8EDF2"/>
@@ -7434,7 +7340,7 @@
                     <a:bodyPr/>
                     <a:lstStyle/>
                     <a:p>
-                      <a:pPr indent="0" marL="0">
+                      <a:pPr marL="0" indent="0">
                         <a:buNone/>
                       </a:pPr>
                       <a:r>
@@ -7455,7 +7361,7 @@
                       </a:endParaRPr>
                     </a:p>
                   </a:txBody>
-                  <a:tcPr marL="91440" marR="91440" marT="45720" marB="45720">
+                  <a:tcPr>
                     <a:lnL w="6350" cap="flat" cmpd="sng" algn="ctr">
                       <a:solidFill>
                         <a:srgbClr val="E8EDF2"/>
@@ -7499,7 +7405,7 @@
                     <a:bodyPr/>
                     <a:lstStyle/>
                     <a:p>
-                      <a:pPr indent="0" marL="0">
+                      <a:pPr marL="0" indent="0">
                         <a:buNone/>
                       </a:pPr>
                       <a:r>
@@ -7520,7 +7426,7 @@
                       </a:endParaRPr>
                     </a:p>
                   </a:txBody>
-                  <a:tcPr marL="91440" marR="91440" marT="45720" marB="45720">
+                  <a:tcPr>
                     <a:lnL w="6350" cap="flat" cmpd="sng" algn="ctr">
                       <a:solidFill>
                         <a:srgbClr val="E8EDF2"/>
@@ -7564,7 +7470,7 @@
                     <a:bodyPr/>
                     <a:lstStyle/>
                     <a:p>
-                      <a:pPr indent="0" marL="0">
+                      <a:pPr marL="0" indent="0">
                         <a:buNone/>
                       </a:pPr>
                       <a:r>
@@ -7585,7 +7491,7 @@
                       </a:endParaRPr>
                     </a:p>
                   </a:txBody>
-                  <a:tcPr marL="91440" marR="91440" marT="45720" marB="45720">
+                  <a:tcPr>
                     <a:lnL w="6350" cap="flat" cmpd="sng" algn="ctr">
                       <a:solidFill>
                         <a:srgbClr val="E8EDF2"/>
@@ -7624,6 +7530,11 @@
                     </a:lnB>
                   </a:tcPr>
                 </a:tc>
+                <a:extLst>
+                  <a:ext uri="{0D108BD9-81ED-4DB2-BD59-A6C34878D82A}">
+                    <a16:rowId xmlns:a16="http://schemas.microsoft.com/office/drawing/2014/main" val="10005"/>
+                  </a:ext>
+                </a:extLst>
               </a:tr>
               <a:tr h="548640">
                 <a:tc>
@@ -7631,7 +7542,7 @@
                     <a:bodyPr/>
                     <a:lstStyle/>
                     <a:p>
-                      <a:pPr indent="0" marL="0">
+                      <a:pPr marL="0" indent="0">
                         <a:buNone/>
                       </a:pPr>
                       <a:r>
@@ -7652,7 +7563,7 @@
                       </a:endParaRPr>
                     </a:p>
                   </a:txBody>
-                  <a:tcPr marL="91440" marR="91440" marT="45720" marB="45720">
+                  <a:tcPr>
                     <a:lnL w="6350" cap="flat" cmpd="sng" algn="ctr">
                       <a:solidFill>
                         <a:srgbClr val="E8EDF2"/>
@@ -7696,7 +7607,7 @@
                     <a:bodyPr/>
                     <a:lstStyle/>
                     <a:p>
-                      <a:pPr indent="0" marL="0">
+                      <a:pPr marL="0" indent="0">
                         <a:buNone/>
                       </a:pPr>
                       <a:r>
@@ -7717,7 +7628,7 @@
                       </a:endParaRPr>
                     </a:p>
                   </a:txBody>
-                  <a:tcPr marL="91440" marR="91440" marT="45720" marB="45720">
+                  <a:tcPr>
                     <a:lnL w="6350" cap="flat" cmpd="sng" algn="ctr">
                       <a:solidFill>
                         <a:srgbClr val="E8EDF2"/>
@@ -7761,7 +7672,7 @@
                     <a:bodyPr/>
                     <a:lstStyle/>
                     <a:p>
-                      <a:pPr indent="0" marL="0">
+                      <a:pPr marL="0" indent="0">
                         <a:buNone/>
                       </a:pPr>
                       <a:r>
@@ -7782,7 +7693,7 @@
                       </a:endParaRPr>
                     </a:p>
                   </a:txBody>
-                  <a:tcPr marL="91440" marR="91440" marT="45720" marB="45720">
+                  <a:tcPr>
                     <a:lnL w="6350" cap="flat" cmpd="sng" algn="ctr">
                       <a:solidFill>
                         <a:srgbClr val="E8EDF2"/>
@@ -7826,7 +7737,7 @@
                     <a:bodyPr/>
                     <a:lstStyle/>
                     <a:p>
-                      <a:pPr indent="0" marL="0">
+                      <a:pPr marL="0" indent="0">
                         <a:buNone/>
                       </a:pPr>
                       <a:r>
@@ -7847,7 +7758,7 @@
                       </a:endParaRPr>
                     </a:p>
                   </a:txBody>
-                  <a:tcPr marL="91440" marR="91440" marT="45720" marB="45720">
+                  <a:tcPr>
                     <a:lnL w="6350" cap="flat" cmpd="sng" algn="ctr">
                       <a:solidFill>
                         <a:srgbClr val="E8EDF2"/>
@@ -7886,6 +7797,11 @@
                     </a:lnB>
                   </a:tcPr>
                 </a:tc>
+                <a:extLst>
+                  <a:ext uri="{0D108BD9-81ED-4DB2-BD59-A6C34878D82A}">
+                    <a16:rowId xmlns:a16="http://schemas.microsoft.com/office/drawing/2014/main" val="10006"/>
+                  </a:ext>
+                </a:extLst>
               </a:tr>
               <a:tr h="548640">
                 <a:tc>
@@ -7893,7 +7809,7 @@
                     <a:bodyPr/>
                     <a:lstStyle/>
                     <a:p>
-                      <a:pPr indent="0" marL="0">
+                      <a:pPr marL="0" indent="0">
                         <a:buNone/>
                       </a:pPr>
                       <a:r>
@@ -7914,7 +7830,7 @@
                       </a:endParaRPr>
                     </a:p>
                   </a:txBody>
-                  <a:tcPr marL="91440" marR="91440" marT="45720" marB="45720">
+                  <a:tcPr>
                     <a:lnL w="6350" cap="flat" cmpd="sng" algn="ctr">
                       <a:solidFill>
                         <a:srgbClr val="E8EDF2"/>
@@ -7958,7 +7874,7 @@
                     <a:bodyPr/>
                     <a:lstStyle/>
                     <a:p>
-                      <a:pPr indent="0" marL="0">
+                      <a:pPr marL="0" indent="0">
                         <a:buNone/>
                       </a:pPr>
                       <a:r>
@@ -7979,7 +7895,7 @@
                       </a:endParaRPr>
                     </a:p>
                   </a:txBody>
-                  <a:tcPr marL="91440" marR="91440" marT="45720" marB="45720">
+                  <a:tcPr>
                     <a:lnL w="6350" cap="flat" cmpd="sng" algn="ctr">
                       <a:solidFill>
                         <a:srgbClr val="E8EDF2"/>
@@ -8023,7 +7939,7 @@
                     <a:bodyPr/>
                     <a:lstStyle/>
                     <a:p>
-                      <a:pPr indent="0" marL="0">
+                      <a:pPr marL="0" indent="0">
                         <a:buNone/>
                       </a:pPr>
                       <a:r>
@@ -8044,7 +7960,7 @@
                       </a:endParaRPr>
                     </a:p>
                   </a:txBody>
-                  <a:tcPr marL="91440" marR="91440" marT="45720" marB="45720">
+                  <a:tcPr>
                     <a:lnL w="6350" cap="flat" cmpd="sng" algn="ctr">
                       <a:solidFill>
                         <a:srgbClr val="E8EDF2"/>
@@ -8088,7 +8004,7 @@
                     <a:bodyPr/>
                     <a:lstStyle/>
                     <a:p>
-                      <a:pPr indent="0" marL="0">
+                      <a:pPr marL="0" indent="0">
                         <a:buNone/>
                       </a:pPr>
                       <a:r>
@@ -8109,7 +8025,7 @@
                       </a:endParaRPr>
                     </a:p>
                   </a:txBody>
-                  <a:tcPr marL="91440" marR="91440" marT="45720" marB="45720">
+                  <a:tcPr>
                     <a:lnL w="6350" cap="flat" cmpd="sng" algn="ctr">
                       <a:solidFill>
                         <a:srgbClr val="E8EDF2"/>
@@ -8148,6 +8064,11 @@
                     </a:lnB>
                   </a:tcPr>
                 </a:tc>
+                <a:extLst>
+                  <a:ext uri="{0D108BD9-81ED-4DB2-BD59-A6C34878D82A}">
+                    <a16:rowId xmlns:a16="http://schemas.microsoft.com/office/drawing/2014/main" val="10007"/>
+                  </a:ext>
+                </a:extLst>
               </a:tr>
             </a:tbl>
           </a:graphicData>
@@ -8169,6 +8090,7 @@
         <a:solidFill>
           <a:srgbClr val="F4F7F9"/>
         </a:solidFill>
+        <a:effectLst/>
       </p:bgPr>
     </p:bg>
     <p:spTree>
@@ -8256,7 +8178,7 @@
           <a:bodyPr wrap="square" lIns="0" tIns="0" rIns="0" bIns="0" rtlCol="0" anchor="ctr"/>
           <a:lstStyle/>
           <a:p>
-            <a:pPr indent="0" marL="0">
+            <a:pPr marL="0" indent="0">
               <a:buNone/>
             </a:pPr>
             <a:r>
@@ -8298,7 +8220,7 @@
             <a:prstDash val="solid"/>
           </a:ln>
           <a:effectLst>
-            <a:outerShdw sx="100000" sy="100000" kx="0" ky="0" algn="bl" rotWithShape="0" blurRad="63500" dist="25400" dir="8100000">
+            <a:outerShdw blurRad="63500" dist="25400" dir="8100000" algn="bl" rotWithShape="0">
               <a:srgbClr val="000000">
                 <a:alpha val="8000"/>
               </a:srgbClr>
@@ -8327,7 +8249,7 @@
           <a:bodyPr wrap="square" lIns="0" tIns="0" rIns="0" bIns="0" rtlCol="0" anchor="ctr"/>
           <a:lstStyle/>
           <a:p>
-            <a:pPr algn="ctr" indent="0" marL="0">
+            <a:pPr marL="0" indent="0" algn="ctr">
               <a:buNone/>
             </a:pPr>
             <a:r>
@@ -8391,7 +8313,7 @@
           <a:bodyPr wrap="square" lIns="0" tIns="0" rIns="0" bIns="0" rtlCol="0" anchor="ctr"/>
           <a:lstStyle/>
           <a:p>
-            <a:pPr indent="0" marL="0">
+            <a:pPr marL="0" indent="0">
               <a:buNone/>
             </a:pPr>
             <a:r>
@@ -8455,7 +8377,7 @@
           <a:bodyPr wrap="square" lIns="0" tIns="0" rIns="0" bIns="0" rtlCol="0" anchor="ctr"/>
           <a:lstStyle/>
           <a:p>
-            <a:pPr indent="0" marL="0">
+            <a:pPr marL="0" indent="0">
               <a:buNone/>
             </a:pPr>
             <a:r>
@@ -8519,7 +8441,7 @@
           <a:bodyPr wrap="square" lIns="0" tIns="0" rIns="0" bIns="0" rtlCol="0" anchor="ctr"/>
           <a:lstStyle/>
           <a:p>
-            <a:pPr indent="0" marL="0">
+            <a:pPr marL="0" indent="0">
               <a:buNone/>
             </a:pPr>
             <a:r>
@@ -8583,7 +8505,7 @@
           <a:bodyPr wrap="square" lIns="0" tIns="0" rIns="0" bIns="0" rtlCol="0" anchor="ctr"/>
           <a:lstStyle/>
           <a:p>
-            <a:pPr indent="0" marL="0">
+            <a:pPr marL="0" indent="0">
               <a:buNone/>
             </a:pPr>
             <a:r>
@@ -8647,7 +8569,7 @@
           <a:bodyPr wrap="square" lIns="0" tIns="0" rIns="0" bIns="0" rtlCol="0" anchor="ctr"/>
           <a:lstStyle/>
           <a:p>
-            <a:pPr indent="0" marL="0">
+            <a:pPr marL="0" indent="0">
               <a:buNone/>
             </a:pPr>
             <a:r>
@@ -8689,7 +8611,7 @@
             <a:prstDash val="solid"/>
           </a:ln>
           <a:effectLst>
-            <a:outerShdw sx="100000" sy="100000" kx="0" ky="0" algn="bl" rotWithShape="0" blurRad="63500" dist="25400" dir="8100000">
+            <a:outerShdw blurRad="63500" dist="25400" dir="8100000" algn="bl" rotWithShape="0">
               <a:srgbClr val="000000">
                 <a:alpha val="8000"/>
               </a:srgbClr>
@@ -8718,7 +8640,7 @@
           <a:bodyPr wrap="square" lIns="0" tIns="0" rIns="0" bIns="0" rtlCol="0" anchor="ctr"/>
           <a:lstStyle/>
           <a:p>
-            <a:pPr algn="ctr" indent="0" marL="0">
+            <a:pPr marL="0" indent="0" algn="ctr">
               <a:buNone/>
             </a:pPr>
             <a:r>
@@ -8757,7 +8679,7 @@
           <a:bodyPr wrap="square" lIns="0" tIns="0" rIns="0" bIns="0" rtlCol="0" anchor="ctr"/>
           <a:lstStyle/>
           <a:p>
-            <a:pPr indent="0" marL="0">
+            <a:pPr marL="0" indent="0">
               <a:buNone/>
             </a:pPr>
             <a:r>
@@ -8796,7 +8718,7 @@
           <a:bodyPr wrap="square" lIns="0" tIns="0" rIns="0" bIns="0" rtlCol="0" anchor="ctr"/>
           <a:lstStyle/>
           <a:p>
-            <a:pPr indent="0" marL="0">
+            <a:pPr marL="0" indent="0">
               <a:buNone/>
             </a:pPr>
             <a:r>
@@ -8835,7 +8757,7 @@
           <a:bodyPr wrap="square" lIns="0" tIns="0" rIns="0" bIns="0" rtlCol="0" anchor="ctr"/>
           <a:lstStyle/>
           <a:p>
-            <a:pPr indent="0" marL="0">
+            <a:pPr marL="0" indent="0">
               <a:buNone/>
             </a:pPr>
             <a:r>
@@ -8874,7 +8796,7 @@
           <a:bodyPr wrap="square" lIns="0" tIns="0" rIns="0" bIns="0" rtlCol="0" anchor="ctr"/>
           <a:lstStyle/>
           <a:p>
-            <a:pPr indent="0" marL="0">
+            <a:pPr marL="0" indent="0">
               <a:buNone/>
             </a:pPr>
             <a:r>
@@ -8913,7 +8835,7 @@
           <a:bodyPr wrap="square" lIns="0" tIns="0" rIns="0" bIns="0" rtlCol="0" anchor="ctr"/>
           <a:lstStyle/>
           <a:p>
-            <a:pPr indent="0" marL="0">
+            <a:pPr marL="0" indent="0">
               <a:buNone/>
             </a:pPr>
             <a:r>
@@ -8952,7 +8874,7 @@
           <a:bodyPr wrap="square" lIns="0" tIns="0" rIns="0" bIns="0" rtlCol="0" anchor="ctr"/>
           <a:lstStyle/>
           <a:p>
-            <a:pPr indent="0" marL="0">
+            <a:pPr marL="0" indent="0">
               <a:buNone/>
             </a:pPr>
             <a:r>
@@ -8991,7 +8913,7 @@
           <a:bodyPr wrap="square" lIns="0" tIns="0" rIns="0" bIns="0" rtlCol="0" anchor="ctr"/>
           <a:lstStyle/>
           <a:p>
-            <a:pPr indent="0" marL="0">
+            <a:pPr marL="0" indent="0">
               <a:buNone/>
             </a:pPr>
             <a:r>
@@ -9030,7 +8952,7 @@
           <a:bodyPr wrap="square" lIns="0" tIns="0" rIns="0" bIns="0" rtlCol="0" anchor="ctr"/>
           <a:lstStyle/>
           <a:p>
-            <a:pPr indent="0" marL="0">
+            <a:pPr marL="0" indent="0">
               <a:buNone/>
             </a:pPr>
             <a:r>
@@ -9069,7 +8991,7 @@
           <a:bodyPr wrap="square" lIns="0" tIns="0" rIns="0" bIns="0" rtlCol="0" anchor="ctr"/>
           <a:lstStyle/>
           <a:p>
-            <a:pPr indent="0" marL="0">
+            <a:pPr marL="0" indent="0">
               <a:buNone/>
             </a:pPr>
             <a:r>
@@ -9108,7 +9030,7 @@
           <a:bodyPr wrap="square" lIns="0" tIns="0" rIns="0" bIns="0" rtlCol="0" anchor="ctr"/>
           <a:lstStyle/>
           <a:p>
-            <a:pPr indent="0" marL="0">
+            <a:pPr marL="0" indent="0">
               <a:buNone/>
             </a:pPr>
             <a:r>
@@ -9147,7 +9069,7 @@
           <a:bodyPr wrap="square" lIns="0" tIns="0" rIns="0" bIns="0" rtlCol="0" anchor="ctr"/>
           <a:lstStyle/>
           <a:p>
-            <a:pPr indent="0" marL="0">
+            <a:pPr marL="0" indent="0">
               <a:buNone/>
             </a:pPr>
             <a:r>
@@ -9186,7 +9108,7 @@
           <a:bodyPr wrap="square" lIns="0" tIns="0" rIns="0" bIns="0" rtlCol="0" anchor="ctr"/>
           <a:lstStyle/>
           <a:p>
-            <a:pPr indent="0" marL="0">
+            <a:pPr marL="0" indent="0">
               <a:buNone/>
             </a:pPr>
             <a:r>
@@ -9203,7 +9125,7 @@
             <a:endParaRPr lang="en-US" sz="1050" dirty="0"/>
           </a:p>
           <a:p>
-            <a:pPr indent="0" marL="0">
+            <a:pPr marL="0" indent="0">
               <a:buNone/>
             </a:pPr>
             <a:r>
@@ -9237,6 +9159,7 @@
         <a:solidFill>
           <a:srgbClr val="F4F7F9"/>
         </a:solidFill>
+        <a:effectLst/>
       </p:bgPr>
     </p:bg>
     <p:spTree>
@@ -9324,7 +9247,7 @@
           <a:bodyPr wrap="square" lIns="0" tIns="0" rIns="0" bIns="0" rtlCol="0" anchor="ctr"/>
           <a:lstStyle/>
           <a:p>
-            <a:pPr indent="0" marL="0">
+            <a:pPr marL="0" indent="0">
               <a:buNone/>
             </a:pPr>
             <a:r>
@@ -9366,7 +9289,7 @@
             <a:prstDash val="solid"/>
           </a:ln>
           <a:effectLst>
-            <a:outerShdw sx="100000" sy="100000" kx="0" ky="0" algn="bl" rotWithShape="0" blurRad="50800" dist="25400" dir="8100000">
+            <a:outerShdw blurRad="50800" dist="25400" dir="8100000" algn="bl" rotWithShape="0">
               <a:srgbClr val="000000">
                 <a:alpha val="8000"/>
               </a:srgbClr>
@@ -9420,7 +9343,7 @@
           <a:bodyPr wrap="square" lIns="0" tIns="0" rIns="0" bIns="0" rtlCol="0" anchor="ctr"/>
           <a:lstStyle/>
           <a:p>
-            <a:pPr indent="0" marL="0">
+            <a:pPr marL="0" indent="0">
               <a:buNone/>
             </a:pPr>
             <a:r>
@@ -9459,7 +9382,7 @@
           <a:bodyPr wrap="square" lIns="0" tIns="0" rIns="0" bIns="0" rtlCol="0" anchor="ctr"/>
           <a:lstStyle/>
           <a:p>
-            <a:pPr indent="0" marL="0">
+            <a:pPr marL="0" indent="0">
               <a:buNone/>
             </a:pPr>
             <a:r>
@@ -9501,7 +9424,7 @@
             <a:prstDash val="solid"/>
           </a:ln>
           <a:effectLst>
-            <a:outerShdw sx="100000" sy="100000" kx="0" ky="0" algn="bl" rotWithShape="0" blurRad="50800" dist="25400" dir="8100000">
+            <a:outerShdw blurRad="50800" dist="25400" dir="8100000" algn="bl" rotWithShape="0">
               <a:srgbClr val="000000">
                 <a:alpha val="8000"/>
               </a:srgbClr>
@@ -9555,7 +9478,7 @@
           <a:bodyPr wrap="square" lIns="0" tIns="0" rIns="0" bIns="0" rtlCol="0" anchor="ctr"/>
           <a:lstStyle/>
           <a:p>
-            <a:pPr indent="0" marL="0">
+            <a:pPr marL="0" indent="0">
               <a:buNone/>
             </a:pPr>
             <a:r>
@@ -9594,7 +9517,7 @@
           <a:bodyPr wrap="square" lIns="0" tIns="0" rIns="0" bIns="0" rtlCol="0" anchor="ctr"/>
           <a:lstStyle/>
           <a:p>
-            <a:pPr indent="0" marL="0">
+            <a:pPr marL="0" indent="0">
               <a:buNone/>
             </a:pPr>
             <a:r>
@@ -9636,7 +9559,7 @@
             <a:prstDash val="solid"/>
           </a:ln>
           <a:effectLst>
-            <a:outerShdw sx="100000" sy="100000" kx="0" ky="0" algn="bl" rotWithShape="0" blurRad="50800" dist="25400" dir="8100000">
+            <a:outerShdw blurRad="50800" dist="25400" dir="8100000" algn="bl" rotWithShape="0">
               <a:srgbClr val="000000">
                 <a:alpha val="8000"/>
               </a:srgbClr>
@@ -9690,7 +9613,7 @@
           <a:bodyPr wrap="square" lIns="0" tIns="0" rIns="0" bIns="0" rtlCol="0" anchor="ctr"/>
           <a:lstStyle/>
           <a:p>
-            <a:pPr indent="0" marL="0">
+            <a:pPr marL="0" indent="0">
               <a:buNone/>
             </a:pPr>
             <a:r>
@@ -9729,7 +9652,7 @@
           <a:bodyPr wrap="square" lIns="0" tIns="0" rIns="0" bIns="0" rtlCol="0" anchor="ctr"/>
           <a:lstStyle/>
           <a:p>
-            <a:pPr indent="0" marL="0">
+            <a:pPr marL="0" indent="0">
               <a:buNone/>
             </a:pPr>
             <a:r>
@@ -9771,7 +9694,7 @@
             <a:prstDash val="solid"/>
           </a:ln>
           <a:effectLst>
-            <a:outerShdw sx="100000" sy="100000" kx="0" ky="0" algn="bl" rotWithShape="0" blurRad="50800" dist="25400" dir="8100000">
+            <a:outerShdw blurRad="50800" dist="25400" dir="8100000" algn="bl" rotWithShape="0">
               <a:srgbClr val="000000">
                 <a:alpha val="8000"/>
               </a:srgbClr>
@@ -9825,7 +9748,7 @@
           <a:bodyPr wrap="square" lIns="0" tIns="0" rIns="0" bIns="0" rtlCol="0" anchor="ctr"/>
           <a:lstStyle/>
           <a:p>
-            <a:pPr indent="0" marL="0">
+            <a:pPr marL="0" indent="0">
               <a:buNone/>
             </a:pPr>
             <a:r>
@@ -9864,7 +9787,7 @@
           <a:bodyPr wrap="square" lIns="0" tIns="0" rIns="0" bIns="0" rtlCol="0" anchor="ctr"/>
           <a:lstStyle/>
           <a:p>
-            <a:pPr indent="0" marL="0">
+            <a:pPr marL="0" indent="0">
               <a:buNone/>
             </a:pPr>
             <a:r>
@@ -9906,7 +9829,7 @@
             <a:prstDash val="solid"/>
           </a:ln>
           <a:effectLst>
-            <a:outerShdw sx="100000" sy="100000" kx="0" ky="0" algn="bl" rotWithShape="0" blurRad="50800" dist="25400" dir="8100000">
+            <a:outerShdw blurRad="50800" dist="25400" dir="8100000" algn="bl" rotWithShape="0">
               <a:srgbClr val="000000">
                 <a:alpha val="8000"/>
               </a:srgbClr>
@@ -9960,7 +9883,7 @@
           <a:bodyPr wrap="square" lIns="0" tIns="0" rIns="0" bIns="0" rtlCol="0" anchor="ctr"/>
           <a:lstStyle/>
           <a:p>
-            <a:pPr indent="0" marL="0">
+            <a:pPr marL="0" indent="0">
               <a:buNone/>
             </a:pPr>
             <a:r>
@@ -9999,7 +9922,7 @@
           <a:bodyPr wrap="square" lIns="0" tIns="0" rIns="0" bIns="0" rtlCol="0" anchor="ctr"/>
           <a:lstStyle/>
           <a:p>
-            <a:pPr indent="0" marL="0">
+            <a:pPr marL="0" indent="0">
               <a:buNone/>
             </a:pPr>
             <a:r>
@@ -10011,7 +9934,7 @@
                 <a:ea typeface="Calibri" pitchFamily="34" charset="-122"/>
                 <a:cs typeface="Calibri" pitchFamily="34" charset="-120"/>
               </a:rPr>
-              <a:t>Flags features with negative permutation AUC — candidates to drop before next iteration.</a:t>
+              <a:t>Flags features with negative permutation AUC. Candidates to drop before next iteration.</a:t>
             </a:r>
             <a:endParaRPr lang="en-US" sz="1050" dirty="0"/>
           </a:p>
@@ -10041,7 +9964,7 @@
             <a:prstDash val="solid"/>
           </a:ln>
           <a:effectLst>
-            <a:outerShdw sx="100000" sy="100000" kx="0" ky="0" algn="bl" rotWithShape="0" blurRad="50800" dist="25400" dir="8100000">
+            <a:outerShdw blurRad="50800" dist="25400" dir="8100000" algn="bl" rotWithShape="0">
               <a:srgbClr val="000000">
                 <a:alpha val="8000"/>
               </a:srgbClr>
@@ -10095,7 +10018,7 @@
           <a:bodyPr wrap="square" lIns="0" tIns="0" rIns="0" bIns="0" rtlCol="0" anchor="ctr"/>
           <a:lstStyle/>
           <a:p>
-            <a:pPr indent="0" marL="0">
+            <a:pPr marL="0" indent="0">
               <a:buNone/>
             </a:pPr>
             <a:r>
@@ -10134,7 +10057,7 @@
           <a:bodyPr wrap="square" lIns="0" tIns="0" rIns="0" bIns="0" rtlCol="0" anchor="ctr"/>
           <a:lstStyle/>
           <a:p>
-            <a:pPr indent="0" marL="0">
+            <a:pPr marL="0" indent="0">
               <a:buNone/>
             </a:pPr>
             <a:r>
@@ -10168,6 +10091,7 @@
         <a:solidFill>
           <a:srgbClr val="F4F7F9"/>
         </a:solidFill>
+        <a:effectLst/>
       </p:bgPr>
     </p:bg>
     <p:spTree>
@@ -10255,7 +10179,7 @@
           <a:bodyPr wrap="square" lIns="0" tIns="0" rIns="0" bIns="0" rtlCol="0" anchor="ctr"/>
           <a:lstStyle/>
           <a:p>
-            <a:pPr indent="0" marL="0">
+            <a:pPr marL="0" indent="0">
               <a:buNone/>
             </a:pPr>
             <a:r>
@@ -10294,7 +10218,7 @@
           <a:bodyPr wrap="square" lIns="0" tIns="0" rIns="0" bIns="0" rtlCol="0" anchor="ctr"/>
           <a:lstStyle/>
           <a:p>
-            <a:pPr indent="0" marL="0">
+            <a:pPr marL="0" indent="0">
               <a:buNone/>
             </a:pPr>
             <a:r>
@@ -10358,7 +10282,7 @@
           <a:bodyPr wrap="square" lIns="0" tIns="0" rIns="0" bIns="0" rtlCol="0" anchor="ctr"/>
           <a:lstStyle/>
           <a:p>
-            <a:pPr indent="0" marL="0">
+            <a:pPr marL="0" indent="0">
               <a:buNone/>
             </a:pPr>
             <a:r>
@@ -10370,7 +10294,7 @@
                 <a:ea typeface="Calibri" pitchFamily="34" charset="-122"/>
                 <a:cs typeface="Calibri" pitchFamily="34" charset="-120"/>
               </a:rPr>
-              <a:t>Training data is 2009 pandemic survey — hesitancy patterns have shifted since</a:t>
+              <a:t>Training data is 2009 pandemic survey. Hesitancy patterns have shifted since</a:t>
             </a:r>
             <a:endParaRPr lang="en-US" sz="1050" dirty="0"/>
           </a:p>
@@ -10422,7 +10346,7 @@
           <a:bodyPr wrap="square" lIns="0" tIns="0" rIns="0" bIns="0" rtlCol="0" anchor="ctr"/>
           <a:lstStyle/>
           <a:p>
-            <a:pPr indent="0" marL="0">
+            <a:pPr marL="0" indent="0">
               <a:buNone/>
             </a:pPr>
             <a:r>
@@ -10434,7 +10358,7 @@
                 <a:ea typeface="Calibri" pitchFamily="34" charset="-122"/>
                 <a:cs typeface="Calibri" pitchFamily="34" charset="-120"/>
               </a:rPr>
-              <a:t>Employment industry/occupation codes are obfuscated — interpretation constrained to data signal only</a:t>
+              <a:t>Employment industry/occupation codes are obfuscated. Interpretation constrained to data signal only</a:t>
             </a:r>
             <a:endParaRPr lang="en-US" sz="1050" dirty="0"/>
           </a:p>
@@ -10486,7 +10410,7 @@
           <a:bodyPr wrap="square" lIns="0" tIns="0" rIns="0" bIns="0" rtlCol="0" anchor="ctr"/>
           <a:lstStyle/>
           <a:p>
-            <a:pPr indent="0" marL="0">
+            <a:pPr marL="0" indent="0">
               <a:buNone/>
             </a:pPr>
             <a:r>
@@ -10498,7 +10422,7 @@
                 <a:ea typeface="Calibri" pitchFamily="34" charset="-122"/>
                 <a:cs typeface="Calibri" pitchFamily="34" charset="-120"/>
               </a:rPr>
-              <a:t>health_insurance 46% missing — residual MAR bias possible</a:t>
+              <a:t>health_insurance 46% missing. Residual MAR bias possible</a:t>
             </a:r>
             <a:endParaRPr lang="en-US" sz="1050" dirty="0"/>
           </a:p>
@@ -10550,7 +10474,7 @@
           <a:bodyPr wrap="square" lIns="0" tIns="0" rIns="0" bIns="0" rtlCol="0" anchor="ctr"/>
           <a:lstStyle/>
           <a:p>
-            <a:pPr indent="0" marL="0">
+            <a:pPr marL="0" indent="0">
               <a:buNone/>
             </a:pPr>
             <a:r>
@@ -10562,7 +10486,7 @@
                 <a:ea typeface="Calibri" pitchFamily="34" charset="-122"/>
                 <a:cs typeface="Calibri" pitchFamily="34" charset="-120"/>
               </a:rPr>
-              <a:t>No temporal structure — model treats survey as cross-sectional snapshot</a:t>
+              <a:t>No temporal structure. Model treats survey as cross-sectional snapshot</a:t>
             </a:r>
             <a:endParaRPr lang="en-US" sz="1050" dirty="0"/>
           </a:p>
@@ -10589,7 +10513,7 @@
           <a:bodyPr wrap="square" lIns="0" tIns="0" rIns="0" bIns="0" rtlCol="0" anchor="ctr"/>
           <a:lstStyle/>
           <a:p>
-            <a:pPr indent="0" marL="0">
+            <a:pPr marL="0" indent="0">
               <a:buNone/>
             </a:pPr>
             <a:r>
@@ -10653,7 +10577,7 @@
           <a:bodyPr wrap="square" lIns="0" tIns="0" rIns="0" bIns="0" rtlCol="0" anchor="ctr"/>
           <a:lstStyle/>
           <a:p>
-            <a:pPr algn="ctr" indent="0" marL="0">
+            <a:pPr marL="0" indent="0" algn="ctr">
               <a:buNone/>
             </a:pPr>
             <a:r>
@@ -10692,7 +10616,7 @@
           <a:bodyPr wrap="square" lIns="0" tIns="0" rIns="0" bIns="0" rtlCol="0" anchor="ctr"/>
           <a:lstStyle/>
           <a:p>
-            <a:pPr indent="0" marL="0">
+            <a:pPr marL="0" indent="0">
               <a:buNone/>
             </a:pPr>
             <a:r>
@@ -10731,7 +10655,7 @@
           <a:bodyPr wrap="square" lIns="0" tIns="0" rIns="0" bIns="0" rtlCol="0" anchor="ctr"/>
           <a:lstStyle/>
           <a:p>
-            <a:pPr indent="0" marL="0">
+            <a:pPr marL="0" indent="0">
               <a:buNone/>
             </a:pPr>
             <a:r>
@@ -10795,7 +10719,7 @@
           <a:bodyPr wrap="square" lIns="0" tIns="0" rIns="0" bIns="0" rtlCol="0" anchor="ctr"/>
           <a:lstStyle/>
           <a:p>
-            <a:pPr algn="ctr" indent="0" marL="0">
+            <a:pPr marL="0" indent="0" algn="ctr">
               <a:buNone/>
             </a:pPr>
             <a:r>
@@ -10834,7 +10758,7 @@
           <a:bodyPr wrap="square" lIns="0" tIns="0" rIns="0" bIns="0" rtlCol="0" anchor="ctr"/>
           <a:lstStyle/>
           <a:p>
-            <a:pPr indent="0" marL="0">
+            <a:pPr marL="0" indent="0">
               <a:buNone/>
             </a:pPr>
             <a:r>
@@ -10873,7 +10797,7 @@
           <a:bodyPr wrap="square" lIns="0" tIns="0" rIns="0" bIns="0" rtlCol="0" anchor="ctr"/>
           <a:lstStyle/>
           <a:p>
-            <a:pPr indent="0" marL="0">
+            <a:pPr marL="0" indent="0">
               <a:buNone/>
             </a:pPr>
             <a:r>
@@ -10937,7 +10861,7 @@
           <a:bodyPr wrap="square" lIns="0" tIns="0" rIns="0" bIns="0" rtlCol="0" anchor="ctr"/>
           <a:lstStyle/>
           <a:p>
-            <a:pPr algn="ctr" indent="0" marL="0">
+            <a:pPr marL="0" indent="0" algn="ctr">
               <a:buNone/>
             </a:pPr>
             <a:r>
@@ -10976,7 +10900,7 @@
           <a:bodyPr wrap="square" lIns="0" tIns="0" rIns="0" bIns="0" rtlCol="0" anchor="ctr"/>
           <a:lstStyle/>
           <a:p>
-            <a:pPr indent="0" marL="0">
+            <a:pPr marL="0" indent="0">
               <a:buNone/>
             </a:pPr>
             <a:r>
@@ -11015,7 +10939,7 @@
           <a:bodyPr wrap="square" lIns="0" tIns="0" rIns="0" bIns="0" rtlCol="0" anchor="ctr"/>
           <a:lstStyle/>
           <a:p>
-            <a:pPr indent="0" marL="0">
+            <a:pPr marL="0" indent="0">
               <a:buNone/>
             </a:pPr>
             <a:r>
@@ -11079,7 +11003,7 @@
           <a:bodyPr wrap="square" lIns="0" tIns="0" rIns="0" bIns="0" rtlCol="0" anchor="ctr"/>
           <a:lstStyle/>
           <a:p>
-            <a:pPr algn="ctr" indent="0" marL="0">
+            <a:pPr marL="0" indent="0" algn="ctr">
               <a:buNone/>
             </a:pPr>
             <a:r>
@@ -11118,7 +11042,7 @@
           <a:bodyPr wrap="square" lIns="0" tIns="0" rIns="0" bIns="0" rtlCol="0" anchor="ctr"/>
           <a:lstStyle/>
           <a:p>
-            <a:pPr indent="0" marL="0">
+            <a:pPr marL="0" indent="0">
               <a:buNone/>
             </a:pPr>
             <a:r>
@@ -11157,7 +11081,7 @@
           <a:bodyPr wrap="square" lIns="0" tIns="0" rIns="0" bIns="0" rtlCol="0" anchor="ctr"/>
           <a:lstStyle/>
           <a:p>
-            <a:pPr indent="0" marL="0">
+            <a:pPr marL="0" indent="0">
               <a:buNone/>
             </a:pPr>
             <a:r>
@@ -11476,4 +11400,299 @@
     </a:ext>
   </a:extLst>
 </a:theme>
+</file>
+
+<file path=ppt/theme/theme2.xml><?xml version="1.0" encoding="utf-8"?>
+<a:theme xmlns:a="http://schemas.openxmlformats.org/drawingml/2006/main" name="Office Theme">
+  <a:themeElements>
+    <a:clrScheme name="Office">
+      <a:dk1>
+        <a:sysClr val="windowText" lastClr="000000"/>
+      </a:dk1>
+      <a:lt1>
+        <a:sysClr val="window" lastClr="FFFFFF"/>
+      </a:lt1>
+      <a:dk2>
+        <a:srgbClr val="44546A"/>
+      </a:dk2>
+      <a:lt2>
+        <a:srgbClr val="E7E6E6"/>
+      </a:lt2>
+      <a:accent1>
+        <a:srgbClr val="4472C4"/>
+      </a:accent1>
+      <a:accent2>
+        <a:srgbClr val="ED7D31"/>
+      </a:accent2>
+      <a:accent3>
+        <a:srgbClr val="A5A5A5"/>
+      </a:accent3>
+      <a:accent4>
+        <a:srgbClr val="FFC000"/>
+      </a:accent4>
+      <a:accent5>
+        <a:srgbClr val="5B9BD5"/>
+      </a:accent5>
+      <a:accent6>
+        <a:srgbClr val="70AD47"/>
+      </a:accent6>
+      <a:hlink>
+        <a:srgbClr val="0563C1"/>
+      </a:hlink>
+      <a:folHlink>
+        <a:srgbClr val="954F72"/>
+      </a:folHlink>
+    </a:clrScheme>
+    <a:fontScheme name="Office">
+      <a:majorFont>
+        <a:latin typeface="Calibri Light" panose="020F0302020204030204"/>
+        <a:ea typeface=""/>
+        <a:cs typeface=""/>
+        <a:font script="Jpan" typeface="游ゴシック Light"/>
+        <a:font script="Hang" typeface="맑은 고딕"/>
+        <a:font script="Hans" typeface="等线 Light"/>
+        <a:font script="Hant" typeface="新細明體"/>
+        <a:font script="Arab" typeface="Times New Roman"/>
+        <a:font script="Hebr" typeface="Times New Roman"/>
+        <a:font script="Thai" typeface="Angsana New"/>
+        <a:font script="Ethi" typeface="Nyala"/>
+        <a:font script="Beng" typeface="Vrinda"/>
+        <a:font script="Gujr" typeface="Shruti"/>
+        <a:font script="Khmr" typeface="MoolBoran"/>
+        <a:font script="Knda" typeface="Tunga"/>
+        <a:font script="Guru" typeface="Raavi"/>
+        <a:font script="Cans" typeface="Euphemia"/>
+        <a:font script="Cher" typeface="Plantagenet Cherokee"/>
+        <a:font script="Yiii" typeface="Microsoft Yi Baiti"/>
+        <a:font script="Tibt" typeface="Microsoft Himalaya"/>
+        <a:font script="Thaa" typeface="MV Boli"/>
+        <a:font script="Deva" typeface="Mangal"/>
+        <a:font script="Telu" typeface="Gautami"/>
+        <a:font script="Taml" typeface="Latha"/>
+        <a:font script="Syrc" typeface="Estrangelo Edessa"/>
+        <a:font script="Orya" typeface="Kalinga"/>
+        <a:font script="Mlym" typeface="Kartika"/>
+        <a:font script="Laoo" typeface="DokChampa"/>
+        <a:font script="Sinh" typeface="Iskoola Pota"/>
+        <a:font script="Mong" typeface="Mongolian Baiti"/>
+        <a:font script="Viet" typeface="Times New Roman"/>
+        <a:font script="Uigh" typeface="Microsoft Uighur"/>
+        <a:font script="Geor" typeface="Sylfaen"/>
+        <a:font script="Armn" typeface="Arial"/>
+        <a:font script="Bugi" typeface="Leelawadee UI"/>
+        <a:font script="Bopo" typeface="Microsoft JhengHei"/>
+        <a:font script="Java" typeface="Javanese Text"/>
+        <a:font script="Lisu" typeface="Segoe UI"/>
+        <a:font script="Mymr" typeface="Myanmar Text"/>
+        <a:font script="Nkoo" typeface="Ebrima"/>
+        <a:font script="Olck" typeface="Nirmala UI"/>
+        <a:font script="Osma" typeface="Ebrima"/>
+        <a:font script="Phag" typeface="Phagspa"/>
+        <a:font script="Syrn" typeface="Estrangelo Edessa"/>
+        <a:font script="Syrj" typeface="Estrangelo Edessa"/>
+        <a:font script="Syre" typeface="Estrangelo Edessa"/>
+        <a:font script="Sora" typeface="Nirmala UI"/>
+        <a:font script="Tale" typeface="Microsoft Tai Le"/>
+        <a:font script="Talu" typeface="Microsoft New Tai Lue"/>
+        <a:font script="Tfng" typeface="Ebrima"/>
+      </a:majorFont>
+      <a:minorFont>
+        <a:latin typeface="Calibri" panose="020F0502020204030204"/>
+        <a:ea typeface=""/>
+        <a:cs typeface=""/>
+        <a:font script="Jpan" typeface="游ゴシック"/>
+        <a:font script="Hang" typeface="맑은 고딕"/>
+        <a:font script="Hans" typeface="等线"/>
+        <a:font script="Hant" typeface="新細明體"/>
+        <a:font script="Arab" typeface="Arial"/>
+        <a:font script="Hebr" typeface="Arial"/>
+        <a:font script="Thai" typeface="Cordia New"/>
+        <a:font script="Ethi" typeface="Nyala"/>
+        <a:font script="Beng" typeface="Vrinda"/>
+        <a:font script="Gujr" typeface="Shruti"/>
+        <a:font script="Khmr" typeface="DaunPenh"/>
+        <a:font script="Knda" typeface="Tunga"/>
+        <a:font script="Guru" typeface="Raavi"/>
+        <a:font script="Cans" typeface="Euphemia"/>
+        <a:font script="Cher" typeface="Plantagenet Cherokee"/>
+        <a:font script="Yiii" typeface="Microsoft Yi Baiti"/>
+        <a:font script="Tibt" typeface="Microsoft Himalaya"/>
+        <a:font script="Thaa" typeface="MV Boli"/>
+        <a:font script="Deva" typeface="Mangal"/>
+        <a:font script="Telu" typeface="Gautami"/>
+        <a:font script="Taml" typeface="Latha"/>
+        <a:font script="Syrc" typeface="Estrangelo Edessa"/>
+        <a:font script="Orya" typeface="Kalinga"/>
+        <a:font script="Mlym" typeface="Kartika"/>
+        <a:font script="Laoo" typeface="DokChampa"/>
+        <a:font script="Sinh" typeface="Iskoola Pota"/>
+        <a:font script="Mong" typeface="Mongolian Baiti"/>
+        <a:font script="Viet" typeface="Arial"/>
+        <a:font script="Uigh" typeface="Microsoft Uighur"/>
+        <a:font script="Geor" typeface="Sylfaen"/>
+        <a:font script="Armn" typeface="Arial"/>
+        <a:font script="Bugi" typeface="Leelawadee UI"/>
+        <a:font script="Bopo" typeface="Microsoft JhengHei"/>
+        <a:font script="Java" typeface="Javanese Text"/>
+        <a:font script="Lisu" typeface="Segoe UI"/>
+        <a:font script="Mymr" typeface="Myanmar Text"/>
+        <a:font script="Nkoo" typeface="Ebrima"/>
+        <a:font script="Olck" typeface="Nirmala UI"/>
+        <a:font script="Osma" typeface="Ebrima"/>
+        <a:font script="Phag" typeface="Phagspa"/>
+        <a:font script="Syrn" typeface="Estrangelo Edessa"/>
+        <a:font script="Syrj" typeface="Estrangelo Edessa"/>
+        <a:font script="Syre" typeface="Estrangelo Edessa"/>
+        <a:font script="Sora" typeface="Nirmala UI"/>
+        <a:font script="Tale" typeface="Microsoft Tai Le"/>
+        <a:font script="Talu" typeface="Microsoft New Tai Lue"/>
+        <a:font script="Tfng" typeface="Ebrima"/>
+      </a:minorFont>
+    </a:fontScheme>
+    <a:fmtScheme name="Office">
+      <a:fillStyleLst>
+        <a:solidFill>
+          <a:schemeClr val="phClr"/>
+        </a:solidFill>
+        <a:gradFill rotWithShape="1">
+          <a:gsLst>
+            <a:gs pos="0">
+              <a:schemeClr val="phClr">
+                <a:lumMod val="110000"/>
+                <a:satMod val="105000"/>
+                <a:tint val="67000"/>
+              </a:schemeClr>
+            </a:gs>
+            <a:gs pos="50000">
+              <a:schemeClr val="phClr">
+                <a:lumMod val="105000"/>
+                <a:satMod val="103000"/>
+                <a:tint val="73000"/>
+              </a:schemeClr>
+            </a:gs>
+            <a:gs pos="100000">
+              <a:schemeClr val="phClr">
+                <a:lumMod val="105000"/>
+                <a:satMod val="109000"/>
+                <a:tint val="81000"/>
+              </a:schemeClr>
+            </a:gs>
+          </a:gsLst>
+          <a:lin ang="5400000" scaled="0"/>
+        </a:gradFill>
+        <a:gradFill rotWithShape="1">
+          <a:gsLst>
+            <a:gs pos="0">
+              <a:schemeClr val="phClr">
+                <a:satMod val="103000"/>
+                <a:lumMod val="102000"/>
+                <a:tint val="94000"/>
+              </a:schemeClr>
+            </a:gs>
+            <a:gs pos="50000">
+              <a:schemeClr val="phClr">
+                <a:satMod val="110000"/>
+                <a:lumMod val="100000"/>
+                <a:shade val="100000"/>
+              </a:schemeClr>
+            </a:gs>
+            <a:gs pos="100000">
+              <a:schemeClr val="phClr">
+                <a:lumMod val="99000"/>
+                <a:satMod val="120000"/>
+                <a:shade val="78000"/>
+              </a:schemeClr>
+            </a:gs>
+          </a:gsLst>
+          <a:lin ang="5400000" scaled="0"/>
+        </a:gradFill>
+      </a:fillStyleLst>
+      <a:lnStyleLst>
+        <a:ln w="6350" cap="flat" cmpd="sng" algn="ctr">
+          <a:solidFill>
+            <a:schemeClr val="phClr"/>
+          </a:solidFill>
+          <a:prstDash val="solid"/>
+          <a:miter lim="800000"/>
+        </a:ln>
+        <a:ln w="12700" cap="flat" cmpd="sng" algn="ctr">
+          <a:solidFill>
+            <a:schemeClr val="phClr"/>
+          </a:solidFill>
+          <a:prstDash val="solid"/>
+          <a:miter lim="800000"/>
+        </a:ln>
+        <a:ln w="19050" cap="flat" cmpd="sng" algn="ctr">
+          <a:solidFill>
+            <a:schemeClr val="phClr"/>
+          </a:solidFill>
+          <a:prstDash val="solid"/>
+          <a:miter lim="800000"/>
+        </a:ln>
+      </a:lnStyleLst>
+      <a:effectStyleLst>
+        <a:effectStyle>
+          <a:effectLst/>
+        </a:effectStyle>
+        <a:effectStyle>
+          <a:effectLst/>
+        </a:effectStyle>
+        <a:effectStyle>
+          <a:effectLst>
+            <a:outerShdw blurRad="57150" dist="19050" dir="5400000" algn="ctr" rotWithShape="0">
+              <a:srgbClr val="000000">
+                <a:alpha val="63000"/>
+              </a:srgbClr>
+            </a:outerShdw>
+          </a:effectLst>
+        </a:effectStyle>
+      </a:effectStyleLst>
+      <a:bgFillStyleLst>
+        <a:solidFill>
+          <a:schemeClr val="phClr"/>
+        </a:solidFill>
+        <a:solidFill>
+          <a:schemeClr val="phClr">
+            <a:tint val="95000"/>
+            <a:satMod val="170000"/>
+          </a:schemeClr>
+        </a:solidFill>
+        <a:gradFill rotWithShape="1">
+          <a:gsLst>
+            <a:gs pos="0">
+              <a:schemeClr val="phClr">
+                <a:tint val="93000"/>
+                <a:satMod val="150000"/>
+                <a:shade val="98000"/>
+                <a:lumMod val="102000"/>
+              </a:schemeClr>
+            </a:gs>
+            <a:gs pos="50000">
+              <a:schemeClr val="phClr">
+                <a:tint val="98000"/>
+                <a:satMod val="130000"/>
+                <a:shade val="90000"/>
+                <a:lumMod val="103000"/>
+              </a:schemeClr>
+            </a:gs>
+            <a:gs pos="100000">
+              <a:schemeClr val="phClr">
+                <a:shade val="63000"/>
+                <a:satMod val="120000"/>
+              </a:schemeClr>
+            </a:gs>
+          </a:gsLst>
+          <a:lin ang="5400000" scaled="0"/>
+        </a:gradFill>
+      </a:bgFillStyleLst>
+    </a:fmtScheme>
+  </a:themeElements>
+  <a:objectDefaults/>
+  <a:extraClrSchemeLst/>
+  <a:extLst>
+    <a:ext uri="{05A4C25C-085E-4340-85A3-A5531E510DB2}">
+      <thm15:themeFamily xmlns:thm15="http://schemas.microsoft.com/office/thememl/2012/main" name="Office Theme" id="{62F939B6-93AF-4DB8-9C6B-D6C7DFDC589F}" vid="{4A3C46E8-61CC-4603-A589-7422A47A8E4A}"/>
+    </a:ext>
+  </a:extLst>
+</a:theme>
 </file>